--- a/docs/plots/grant/jx_grant_linsubhr_diff_sideeffect.pptx
+++ b/docs/plots/grant/jx_grant_linsubhr_diff_sideeffect.pptx
@@ -2271,7 +2271,7 @@
           </p:nvSpPr>
           <p:spPr>
             <a:xfrm>
-              <a:off x="915645" y="5038294"/>
+              <a:off x="915645" y="5067975"/>
               <a:ext cx="7682587" cy="0"/>
             </a:xfrm>
             <a:custGeom>
@@ -2314,7 +2314,7 @@
           </p:nvSpPr>
           <p:spPr>
             <a:xfrm>
-              <a:off x="915645" y="4273666"/>
+              <a:off x="915645" y="4288924"/>
               <a:ext cx="7682587" cy="0"/>
             </a:xfrm>
             <a:custGeom>
@@ -2357,7 +2357,7 @@
           </p:nvSpPr>
           <p:spPr>
             <a:xfrm>
-              <a:off x="915645" y="3509037"/>
+              <a:off x="915645" y="3509873"/>
               <a:ext cx="7682587" cy="0"/>
             </a:xfrm>
             <a:custGeom>
@@ -2400,7 +2400,7 @@
           </p:nvSpPr>
           <p:spPr>
             <a:xfrm>
-              <a:off x="915645" y="2744409"/>
+              <a:off x="915645" y="2730822"/>
               <a:ext cx="7682587" cy="0"/>
             </a:xfrm>
             <a:custGeom>
@@ -2443,15 +2443,15 @@
           </p:nvSpPr>
           <p:spPr>
             <a:xfrm>
-              <a:off x="1701364" y="2209169"/>
-              <a:ext cx="0" cy="3364365"/>
+              <a:off x="1264853" y="2185486"/>
+              <a:ext cx="0" cy="3427824"/>
             </a:xfrm>
             <a:custGeom>
               <a:avLst/>
               <a:pathLst>
-                <a:path w="0" h="3364365">
+                <a:path w="0" h="3427824">
                   <a:moveTo>
-                    <a:pt x="0" y="3364365"/>
+                    <a:pt x="0" y="3427824"/>
                   </a:moveTo>
                   <a:lnTo>
                     <a:pt x="0" y="0"/>
@@ -2486,15 +2486,15 @@
           </p:nvSpPr>
           <p:spPr>
             <a:xfrm>
-              <a:off x="3447406" y="2209169"/>
-              <a:ext cx="0" cy="3364365"/>
+              <a:off x="2137874" y="2185486"/>
+              <a:ext cx="0" cy="3427824"/>
             </a:xfrm>
             <a:custGeom>
               <a:avLst/>
               <a:pathLst>
-                <a:path w="0" h="3364365">
+                <a:path w="0" h="3427824">
                   <a:moveTo>
-                    <a:pt x="0" y="3364365"/>
+                    <a:pt x="0" y="3427824"/>
                   </a:moveTo>
                   <a:lnTo>
                     <a:pt x="0" y="0"/>
@@ -2529,15 +2529,15 @@
           </p:nvSpPr>
           <p:spPr>
             <a:xfrm>
-              <a:off x="5193449" y="2209169"/>
-              <a:ext cx="0" cy="3364365"/>
+              <a:off x="3010896" y="2185486"/>
+              <a:ext cx="0" cy="3427824"/>
             </a:xfrm>
             <a:custGeom>
               <a:avLst/>
               <a:pathLst>
-                <a:path w="0" h="3364365">
+                <a:path w="0" h="3427824">
                   <a:moveTo>
-                    <a:pt x="0" y="3364365"/>
+                    <a:pt x="0" y="3427824"/>
                   </a:moveTo>
                   <a:lnTo>
                     <a:pt x="0" y="0"/>
@@ -2572,15 +2572,15 @@
           </p:nvSpPr>
           <p:spPr>
             <a:xfrm>
-              <a:off x="6939491" y="2209169"/>
-              <a:ext cx="0" cy="3364365"/>
+              <a:off x="3883917" y="2185486"/>
+              <a:ext cx="0" cy="3427824"/>
             </a:xfrm>
             <a:custGeom>
               <a:avLst/>
               <a:pathLst>
-                <a:path w="0" h="3364365">
+                <a:path w="0" h="3427824">
                   <a:moveTo>
-                    <a:pt x="0" y="3364365"/>
+                    <a:pt x="0" y="3427824"/>
                   </a:moveTo>
                   <a:lnTo>
                     <a:pt x="0" y="0"/>
@@ -2615,26 +2615,26 @@
           </p:nvSpPr>
           <p:spPr>
             <a:xfrm>
-              <a:off x="915645" y="5420609"/>
-              <a:ext cx="7682587" cy="0"/>
+              <a:off x="4756938" y="2185486"/>
+              <a:ext cx="0" cy="3427824"/>
             </a:xfrm>
             <a:custGeom>
               <a:avLst/>
               <a:pathLst>
-                <a:path w="7682587" h="0">
+                <a:path w="0" h="3427824">
                   <a:moveTo>
+                    <a:pt x="0" y="3427824"/>
+                  </a:moveTo>
+                  <a:lnTo>
                     <a:pt x="0" y="0"/>
-                  </a:moveTo>
-                  <a:lnTo>
-                    <a:pt x="7682587" y="0"/>
-                  </a:lnTo>
-                  <a:lnTo>
-                    <a:pt x="7682587" y="0"/>
+                  </a:lnTo>
+                  <a:lnTo>
+                    <a:pt x="0" y="0"/>
                   </a:lnTo>
                 </a:path>
               </a:pathLst>
             </a:custGeom>
-            <a:ln w="17246" cap="flat">
+            <a:ln w="8623" cap="flat">
               <a:solidFill>
                 <a:srgbClr val="EBEBEB">
                   <a:alpha val="100000"/>
@@ -2658,26 +2658,26 @@
           </p:nvSpPr>
           <p:spPr>
             <a:xfrm>
-              <a:off x="915645" y="4655980"/>
-              <a:ext cx="7682587" cy="0"/>
+              <a:off x="5629959" y="2185486"/>
+              <a:ext cx="0" cy="3427824"/>
             </a:xfrm>
             <a:custGeom>
               <a:avLst/>
               <a:pathLst>
-                <a:path w="7682587" h="0">
+                <a:path w="0" h="3427824">
                   <a:moveTo>
+                    <a:pt x="0" y="3427824"/>
+                  </a:moveTo>
+                  <a:lnTo>
                     <a:pt x="0" y="0"/>
-                  </a:moveTo>
-                  <a:lnTo>
-                    <a:pt x="7682587" y="0"/>
-                  </a:lnTo>
-                  <a:lnTo>
-                    <a:pt x="7682587" y="0"/>
+                  </a:lnTo>
+                  <a:lnTo>
+                    <a:pt x="0" y="0"/>
                   </a:lnTo>
                 </a:path>
               </a:pathLst>
             </a:custGeom>
-            <a:ln w="17246" cap="flat">
+            <a:ln w="8623" cap="flat">
               <a:solidFill>
                 <a:srgbClr val="EBEBEB">
                   <a:alpha val="100000"/>
@@ -2701,26 +2701,26 @@
           </p:nvSpPr>
           <p:spPr>
             <a:xfrm>
-              <a:off x="915645" y="3891352"/>
-              <a:ext cx="7682587" cy="0"/>
+              <a:off x="6502981" y="2185486"/>
+              <a:ext cx="0" cy="3427824"/>
             </a:xfrm>
             <a:custGeom>
               <a:avLst/>
               <a:pathLst>
-                <a:path w="7682587" h="0">
+                <a:path w="0" h="3427824">
                   <a:moveTo>
+                    <a:pt x="0" y="3427824"/>
+                  </a:moveTo>
+                  <a:lnTo>
                     <a:pt x="0" y="0"/>
-                  </a:moveTo>
-                  <a:lnTo>
-                    <a:pt x="7682587" y="0"/>
-                  </a:lnTo>
-                  <a:lnTo>
-                    <a:pt x="7682587" y="0"/>
+                  </a:lnTo>
+                  <a:lnTo>
+                    <a:pt x="0" y="0"/>
                   </a:lnTo>
                 </a:path>
               </a:pathLst>
             </a:custGeom>
-            <a:ln w="17246" cap="flat">
+            <a:ln w="8623" cap="flat">
               <a:solidFill>
                 <a:srgbClr val="EBEBEB">
                   <a:alpha val="100000"/>
@@ -2744,26 +2744,26 @@
           </p:nvSpPr>
           <p:spPr>
             <a:xfrm>
-              <a:off x="915645" y="3126723"/>
-              <a:ext cx="7682587" cy="0"/>
+              <a:off x="7376002" y="2185486"/>
+              <a:ext cx="0" cy="3427824"/>
             </a:xfrm>
             <a:custGeom>
               <a:avLst/>
               <a:pathLst>
-                <a:path w="7682587" h="0">
+                <a:path w="0" h="3427824">
                   <a:moveTo>
+                    <a:pt x="0" y="3427824"/>
+                  </a:moveTo>
+                  <a:lnTo>
                     <a:pt x="0" y="0"/>
-                  </a:moveTo>
-                  <a:lnTo>
-                    <a:pt x="7682587" y="0"/>
-                  </a:lnTo>
-                  <a:lnTo>
-                    <a:pt x="7682587" y="0"/>
+                  </a:lnTo>
+                  <a:lnTo>
+                    <a:pt x="0" y="0"/>
                   </a:lnTo>
                 </a:path>
               </a:pathLst>
             </a:custGeom>
-            <a:ln w="17246" cap="flat">
+            <a:ln w="8623" cap="flat">
               <a:solidFill>
                 <a:srgbClr val="EBEBEB">
                   <a:alpha val="100000"/>
@@ -2787,26 +2787,26 @@
           </p:nvSpPr>
           <p:spPr>
             <a:xfrm>
-              <a:off x="915645" y="2362095"/>
-              <a:ext cx="7682587" cy="0"/>
+              <a:off x="8249023" y="2185486"/>
+              <a:ext cx="0" cy="3427824"/>
             </a:xfrm>
             <a:custGeom>
               <a:avLst/>
               <a:pathLst>
-                <a:path w="7682587" h="0">
+                <a:path w="0" h="3427824">
                   <a:moveTo>
+                    <a:pt x="0" y="3427824"/>
+                  </a:moveTo>
+                  <a:lnTo>
                     <a:pt x="0" y="0"/>
-                  </a:moveTo>
-                  <a:lnTo>
-                    <a:pt x="7682587" y="0"/>
-                  </a:lnTo>
-                  <a:lnTo>
-                    <a:pt x="7682587" y="0"/>
+                  </a:lnTo>
+                  <a:lnTo>
+                    <a:pt x="0" y="0"/>
                   </a:lnTo>
                 </a:path>
               </a:pathLst>
             </a:custGeom>
-            <a:ln w="17246" cap="flat">
+            <a:ln w="8623" cap="flat">
               <a:solidFill>
                 <a:srgbClr val="EBEBEB">
                   <a:alpha val="100000"/>
@@ -2830,21 +2830,21 @@
           </p:nvSpPr>
           <p:spPr>
             <a:xfrm>
-              <a:off x="2574385" y="2209169"/>
-              <a:ext cx="0" cy="3364365"/>
+              <a:off x="915645" y="5457500"/>
+              <a:ext cx="7682587" cy="0"/>
             </a:xfrm>
             <a:custGeom>
               <a:avLst/>
               <a:pathLst>
-                <a:path w="0" h="3364365">
+                <a:path w="7682587" h="0">
                   <a:moveTo>
-                    <a:pt x="0" y="3364365"/>
+                    <a:pt x="0" y="0"/>
                   </a:moveTo>
                   <a:lnTo>
-                    <a:pt x="0" y="0"/>
-                  </a:lnTo>
-                  <a:lnTo>
-                    <a:pt x="0" y="0"/>
+                    <a:pt x="7682587" y="0"/>
+                  </a:lnTo>
+                  <a:lnTo>
+                    <a:pt x="7682587" y="0"/>
                   </a:lnTo>
                 </a:path>
               </a:pathLst>
@@ -2873,21 +2873,21 @@
           </p:nvSpPr>
           <p:spPr>
             <a:xfrm>
-              <a:off x="4320427" y="2209169"/>
-              <a:ext cx="0" cy="3364365"/>
+              <a:off x="915645" y="4678449"/>
+              <a:ext cx="7682587" cy="0"/>
             </a:xfrm>
             <a:custGeom>
               <a:avLst/>
               <a:pathLst>
-                <a:path w="0" h="3364365">
+                <a:path w="7682587" h="0">
                   <a:moveTo>
-                    <a:pt x="0" y="3364365"/>
+                    <a:pt x="0" y="0"/>
                   </a:moveTo>
                   <a:lnTo>
-                    <a:pt x="0" y="0"/>
-                  </a:lnTo>
-                  <a:lnTo>
-                    <a:pt x="0" y="0"/>
+                    <a:pt x="7682587" y="0"/>
+                  </a:lnTo>
+                  <a:lnTo>
+                    <a:pt x="7682587" y="0"/>
                   </a:lnTo>
                 </a:path>
               </a:pathLst>
@@ -2916,21 +2916,21 @@
           </p:nvSpPr>
           <p:spPr>
             <a:xfrm>
-              <a:off x="6066470" y="2209169"/>
-              <a:ext cx="0" cy="3364365"/>
+              <a:off x="915645" y="3899398"/>
+              <a:ext cx="7682587" cy="0"/>
             </a:xfrm>
             <a:custGeom>
               <a:avLst/>
               <a:pathLst>
-                <a:path w="0" h="3364365">
+                <a:path w="7682587" h="0">
                   <a:moveTo>
-                    <a:pt x="0" y="3364365"/>
+                    <a:pt x="0" y="0"/>
                   </a:moveTo>
                   <a:lnTo>
-                    <a:pt x="0" y="0"/>
-                  </a:lnTo>
-                  <a:lnTo>
-                    <a:pt x="0" y="0"/>
+                    <a:pt x="7682587" y="0"/>
+                  </a:lnTo>
+                  <a:lnTo>
+                    <a:pt x="7682587" y="0"/>
                   </a:lnTo>
                 </a:path>
               </a:pathLst>
@@ -2959,21 +2959,21 @@
           </p:nvSpPr>
           <p:spPr>
             <a:xfrm>
-              <a:off x="7812512" y="2209169"/>
-              <a:ext cx="0" cy="3364365"/>
+              <a:off x="915645" y="3120347"/>
+              <a:ext cx="7682587" cy="0"/>
             </a:xfrm>
             <a:custGeom>
               <a:avLst/>
               <a:pathLst>
-                <a:path w="0" h="3364365">
+                <a:path w="7682587" h="0">
                   <a:moveTo>
-                    <a:pt x="0" y="3364365"/>
+                    <a:pt x="0" y="0"/>
                   </a:moveTo>
                   <a:lnTo>
-                    <a:pt x="0" y="0"/>
-                  </a:lnTo>
-                  <a:lnTo>
-                    <a:pt x="0" y="0"/>
+                    <a:pt x="7682587" y="0"/>
+                  </a:lnTo>
+                  <a:lnTo>
+                    <a:pt x="7682587" y="0"/>
                   </a:lnTo>
                 </a:path>
               </a:pathLst>
@@ -2996,537 +2996,924 @@
         </p:sp>
         <p:sp>
           <p:nvSpPr>
-            <p:cNvPr id="21" name="pg21"/>
+            <p:cNvPr id="21" name="pl21"/>
             <p:cNvSpPr/>
             <p:nvPr/>
           </p:nvSpPr>
           <p:spPr>
             <a:xfrm>
-              <a:off x="915645" y="2209169"/>
-              <a:ext cx="7260303" cy="3175414"/>
+              <a:off x="915645" y="2341296"/>
+              <a:ext cx="7682587" cy="0"/>
             </a:xfrm>
             <a:custGeom>
               <a:avLst/>
               <a:pathLst>
-                <a:path w="7260303" h="3175414">
+                <a:path w="7682587" h="0">
+                  <a:moveTo>
+                    <a:pt x="0" y="0"/>
+                  </a:moveTo>
+                  <a:lnTo>
+                    <a:pt x="7682587" y="0"/>
+                  </a:lnTo>
+                  <a:lnTo>
+                    <a:pt x="7682587" y="0"/>
+                  </a:lnTo>
+                </a:path>
+              </a:pathLst>
+            </a:custGeom>
+            <a:ln w="17246" cap="flat">
+              <a:solidFill>
+                <a:srgbClr val="EBEBEB">
+                  <a:alpha val="100000"/>
+                </a:srgbClr>
+              </a:solidFill>
+              <a:prstDash val="solid"/>
+              <a:round/>
+            </a:ln>
+          </p:spPr>
+          <p:txBody>
+            <a:bodyPr/>
+            <a:lstStyle/>
+            <a:p/>
+          </p:txBody>
+        </p:sp>
+        <p:sp>
+          <p:nvSpPr>
+            <p:cNvPr id="22" name="pl22"/>
+            <p:cNvSpPr/>
+            <p:nvPr/>
+          </p:nvSpPr>
+          <p:spPr>
+            <a:xfrm>
+              <a:off x="1701364" y="2185486"/>
+              <a:ext cx="0" cy="3427824"/>
+            </a:xfrm>
+            <a:custGeom>
+              <a:avLst/>
+              <a:pathLst>
+                <a:path w="0" h="3427824">
+                  <a:moveTo>
+                    <a:pt x="0" y="3427824"/>
+                  </a:moveTo>
+                  <a:lnTo>
+                    <a:pt x="0" y="0"/>
+                  </a:lnTo>
+                  <a:lnTo>
+                    <a:pt x="0" y="0"/>
+                  </a:lnTo>
+                </a:path>
+              </a:pathLst>
+            </a:custGeom>
+            <a:ln w="17246" cap="flat">
+              <a:solidFill>
+                <a:srgbClr val="EBEBEB">
+                  <a:alpha val="100000"/>
+                </a:srgbClr>
+              </a:solidFill>
+              <a:prstDash val="solid"/>
+              <a:round/>
+            </a:ln>
+          </p:spPr>
+          <p:txBody>
+            <a:bodyPr/>
+            <a:lstStyle/>
+            <a:p/>
+          </p:txBody>
+        </p:sp>
+        <p:sp>
+          <p:nvSpPr>
+            <p:cNvPr id="23" name="pl23"/>
+            <p:cNvSpPr/>
+            <p:nvPr/>
+          </p:nvSpPr>
+          <p:spPr>
+            <a:xfrm>
+              <a:off x="2574385" y="2185486"/>
+              <a:ext cx="0" cy="3427824"/>
+            </a:xfrm>
+            <a:custGeom>
+              <a:avLst/>
+              <a:pathLst>
+                <a:path w="0" h="3427824">
+                  <a:moveTo>
+                    <a:pt x="0" y="3427824"/>
+                  </a:moveTo>
+                  <a:lnTo>
+                    <a:pt x="0" y="0"/>
+                  </a:lnTo>
+                  <a:lnTo>
+                    <a:pt x="0" y="0"/>
+                  </a:lnTo>
+                </a:path>
+              </a:pathLst>
+            </a:custGeom>
+            <a:ln w="17246" cap="flat">
+              <a:solidFill>
+                <a:srgbClr val="EBEBEB">
+                  <a:alpha val="100000"/>
+                </a:srgbClr>
+              </a:solidFill>
+              <a:prstDash val="solid"/>
+              <a:round/>
+            </a:ln>
+          </p:spPr>
+          <p:txBody>
+            <a:bodyPr/>
+            <a:lstStyle/>
+            <a:p/>
+          </p:txBody>
+        </p:sp>
+        <p:sp>
+          <p:nvSpPr>
+            <p:cNvPr id="24" name="pl24"/>
+            <p:cNvSpPr/>
+            <p:nvPr/>
+          </p:nvSpPr>
+          <p:spPr>
+            <a:xfrm>
+              <a:off x="3447406" y="2185486"/>
+              <a:ext cx="0" cy="3427824"/>
+            </a:xfrm>
+            <a:custGeom>
+              <a:avLst/>
+              <a:pathLst>
+                <a:path w="0" h="3427824">
+                  <a:moveTo>
+                    <a:pt x="0" y="3427824"/>
+                  </a:moveTo>
+                  <a:lnTo>
+                    <a:pt x="0" y="0"/>
+                  </a:lnTo>
+                  <a:lnTo>
+                    <a:pt x="0" y="0"/>
+                  </a:lnTo>
+                </a:path>
+              </a:pathLst>
+            </a:custGeom>
+            <a:ln w="17246" cap="flat">
+              <a:solidFill>
+                <a:srgbClr val="EBEBEB">
+                  <a:alpha val="100000"/>
+                </a:srgbClr>
+              </a:solidFill>
+              <a:prstDash val="solid"/>
+              <a:round/>
+            </a:ln>
+          </p:spPr>
+          <p:txBody>
+            <a:bodyPr/>
+            <a:lstStyle/>
+            <a:p/>
+          </p:txBody>
+        </p:sp>
+        <p:sp>
+          <p:nvSpPr>
+            <p:cNvPr id="25" name="pl25"/>
+            <p:cNvSpPr/>
+            <p:nvPr/>
+          </p:nvSpPr>
+          <p:spPr>
+            <a:xfrm>
+              <a:off x="4320427" y="2185486"/>
+              <a:ext cx="0" cy="3427824"/>
+            </a:xfrm>
+            <a:custGeom>
+              <a:avLst/>
+              <a:pathLst>
+                <a:path w="0" h="3427824">
+                  <a:moveTo>
+                    <a:pt x="0" y="3427824"/>
+                  </a:moveTo>
+                  <a:lnTo>
+                    <a:pt x="0" y="0"/>
+                  </a:lnTo>
+                  <a:lnTo>
+                    <a:pt x="0" y="0"/>
+                  </a:lnTo>
+                </a:path>
+              </a:pathLst>
+            </a:custGeom>
+            <a:ln w="17246" cap="flat">
+              <a:solidFill>
+                <a:srgbClr val="EBEBEB">
+                  <a:alpha val="100000"/>
+                </a:srgbClr>
+              </a:solidFill>
+              <a:prstDash val="solid"/>
+              <a:round/>
+            </a:ln>
+          </p:spPr>
+          <p:txBody>
+            <a:bodyPr/>
+            <a:lstStyle/>
+            <a:p/>
+          </p:txBody>
+        </p:sp>
+        <p:sp>
+          <p:nvSpPr>
+            <p:cNvPr id="26" name="pl26"/>
+            <p:cNvSpPr/>
+            <p:nvPr/>
+          </p:nvSpPr>
+          <p:spPr>
+            <a:xfrm>
+              <a:off x="5193449" y="2185486"/>
+              <a:ext cx="0" cy="3427824"/>
+            </a:xfrm>
+            <a:custGeom>
+              <a:avLst/>
+              <a:pathLst>
+                <a:path w="0" h="3427824">
+                  <a:moveTo>
+                    <a:pt x="0" y="3427824"/>
+                  </a:moveTo>
+                  <a:lnTo>
+                    <a:pt x="0" y="0"/>
+                  </a:lnTo>
+                  <a:lnTo>
+                    <a:pt x="0" y="0"/>
+                  </a:lnTo>
+                </a:path>
+              </a:pathLst>
+            </a:custGeom>
+            <a:ln w="17246" cap="flat">
+              <a:solidFill>
+                <a:srgbClr val="EBEBEB">
+                  <a:alpha val="100000"/>
+                </a:srgbClr>
+              </a:solidFill>
+              <a:prstDash val="solid"/>
+              <a:round/>
+            </a:ln>
+          </p:spPr>
+          <p:txBody>
+            <a:bodyPr/>
+            <a:lstStyle/>
+            <a:p/>
+          </p:txBody>
+        </p:sp>
+        <p:sp>
+          <p:nvSpPr>
+            <p:cNvPr id="27" name="pl27"/>
+            <p:cNvSpPr/>
+            <p:nvPr/>
+          </p:nvSpPr>
+          <p:spPr>
+            <a:xfrm>
+              <a:off x="6066470" y="2185486"/>
+              <a:ext cx="0" cy="3427824"/>
+            </a:xfrm>
+            <a:custGeom>
+              <a:avLst/>
+              <a:pathLst>
+                <a:path w="0" h="3427824">
+                  <a:moveTo>
+                    <a:pt x="0" y="3427824"/>
+                  </a:moveTo>
+                  <a:lnTo>
+                    <a:pt x="0" y="0"/>
+                  </a:lnTo>
+                  <a:lnTo>
+                    <a:pt x="0" y="0"/>
+                  </a:lnTo>
+                </a:path>
+              </a:pathLst>
+            </a:custGeom>
+            <a:ln w="17246" cap="flat">
+              <a:solidFill>
+                <a:srgbClr val="EBEBEB">
+                  <a:alpha val="100000"/>
+                </a:srgbClr>
+              </a:solidFill>
+              <a:prstDash val="solid"/>
+              <a:round/>
+            </a:ln>
+          </p:spPr>
+          <p:txBody>
+            <a:bodyPr/>
+            <a:lstStyle/>
+            <a:p/>
+          </p:txBody>
+        </p:sp>
+        <p:sp>
+          <p:nvSpPr>
+            <p:cNvPr id="28" name="pl28"/>
+            <p:cNvSpPr/>
+            <p:nvPr/>
+          </p:nvSpPr>
+          <p:spPr>
+            <a:xfrm>
+              <a:off x="6939491" y="2185486"/>
+              <a:ext cx="0" cy="3427824"/>
+            </a:xfrm>
+            <a:custGeom>
+              <a:avLst/>
+              <a:pathLst>
+                <a:path w="0" h="3427824">
+                  <a:moveTo>
+                    <a:pt x="0" y="3427824"/>
+                  </a:moveTo>
+                  <a:lnTo>
+                    <a:pt x="0" y="0"/>
+                  </a:lnTo>
+                  <a:lnTo>
+                    <a:pt x="0" y="0"/>
+                  </a:lnTo>
+                </a:path>
+              </a:pathLst>
+            </a:custGeom>
+            <a:ln w="17246" cap="flat">
+              <a:solidFill>
+                <a:srgbClr val="EBEBEB">
+                  <a:alpha val="100000"/>
+                </a:srgbClr>
+              </a:solidFill>
+              <a:prstDash val="solid"/>
+              <a:round/>
+            </a:ln>
+          </p:spPr>
+          <p:txBody>
+            <a:bodyPr/>
+            <a:lstStyle/>
+            <a:p/>
+          </p:txBody>
+        </p:sp>
+        <p:sp>
+          <p:nvSpPr>
+            <p:cNvPr id="29" name="pl29"/>
+            <p:cNvSpPr/>
+            <p:nvPr/>
+          </p:nvSpPr>
+          <p:spPr>
+            <a:xfrm>
+              <a:off x="7812512" y="2185486"/>
+              <a:ext cx="0" cy="3427824"/>
+            </a:xfrm>
+            <a:custGeom>
+              <a:avLst/>
+              <a:pathLst>
+                <a:path w="0" h="3427824">
+                  <a:moveTo>
+                    <a:pt x="0" y="3427824"/>
+                  </a:moveTo>
+                  <a:lnTo>
+                    <a:pt x="0" y="0"/>
+                  </a:lnTo>
+                  <a:lnTo>
+                    <a:pt x="0" y="0"/>
+                  </a:lnTo>
+                </a:path>
+              </a:pathLst>
+            </a:custGeom>
+            <a:ln w="17246" cap="flat">
+              <a:solidFill>
+                <a:srgbClr val="EBEBEB">
+                  <a:alpha val="100000"/>
+                </a:srgbClr>
+              </a:solidFill>
+              <a:prstDash val="solid"/>
+              <a:round/>
+            </a:ln>
+          </p:spPr>
+          <p:txBody>
+            <a:bodyPr/>
+            <a:lstStyle/>
+            <a:p/>
+          </p:txBody>
+        </p:sp>
+        <p:sp>
+          <p:nvSpPr>
+            <p:cNvPr id="30" name="pg30"/>
+            <p:cNvSpPr/>
+            <p:nvPr/>
+          </p:nvSpPr>
+          <p:spPr>
+            <a:xfrm>
+              <a:off x="915645" y="2185486"/>
+              <a:ext cx="7260303" cy="3235309"/>
+            </a:xfrm>
+            <a:custGeom>
+              <a:avLst/>
+              <a:pathLst>
+                <a:path w="7260303" h="3235309">
                   <a:moveTo>
                     <a:pt x="1492213" y="0"/>
                   </a:moveTo>
                   <a:lnTo>
-                    <a:pt x="1525171" y="82702"/>
-                  </a:lnTo>
-                  <a:lnTo>
-                    <a:pt x="1601639" y="263497"/>
-                  </a:lnTo>
-                  <a:lnTo>
-                    <a:pt x="1678107" y="433845"/>
-                  </a:lnTo>
-                  <a:lnTo>
-                    <a:pt x="1754576" y="594349"/>
-                  </a:lnTo>
-                  <a:lnTo>
-                    <a:pt x="1831044" y="745578"/>
-                  </a:lnTo>
-                  <a:lnTo>
-                    <a:pt x="1907513" y="888069"/>
-                  </a:lnTo>
-                  <a:lnTo>
-                    <a:pt x="1983981" y="1022325"/>
-                  </a:lnTo>
-                  <a:lnTo>
-                    <a:pt x="2060450" y="1148824"/>
-                  </a:lnTo>
-                  <a:lnTo>
-                    <a:pt x="2136918" y="1268013"/>
-                  </a:lnTo>
-                  <a:lnTo>
-                    <a:pt x="2213386" y="1380314"/>
-                  </a:lnTo>
-                  <a:lnTo>
-                    <a:pt x="2289855" y="1486127"/>
-                  </a:lnTo>
-                  <a:lnTo>
-                    <a:pt x="2366323" y="1585824"/>
-                  </a:lnTo>
-                  <a:lnTo>
-                    <a:pt x="2442792" y="1679761"/>
-                  </a:lnTo>
-                  <a:lnTo>
-                    <a:pt x="2519260" y="1768269"/>
-                  </a:lnTo>
-                  <a:lnTo>
-                    <a:pt x="2595729" y="1851664"/>
-                  </a:lnTo>
-                  <a:lnTo>
-                    <a:pt x="2672197" y="1930239"/>
-                  </a:lnTo>
-                  <a:lnTo>
-                    <a:pt x="2748666" y="2004273"/>
-                  </a:lnTo>
-                  <a:lnTo>
-                    <a:pt x="2825134" y="2074030"/>
-                  </a:lnTo>
-                  <a:lnTo>
-                    <a:pt x="2901602" y="2139755"/>
-                  </a:lnTo>
-                  <a:lnTo>
-                    <a:pt x="2978071" y="2201683"/>
-                  </a:lnTo>
-                  <a:lnTo>
-                    <a:pt x="3054539" y="2260032"/>
-                  </a:lnTo>
-                  <a:lnTo>
-                    <a:pt x="3131008" y="2315009"/>
-                  </a:lnTo>
-                  <a:lnTo>
-                    <a:pt x="3207476" y="2366810"/>
-                  </a:lnTo>
-                  <a:lnTo>
-                    <a:pt x="3283945" y="2415617"/>
-                  </a:lnTo>
-                  <a:lnTo>
-                    <a:pt x="3360413" y="2451684"/>
-                  </a:lnTo>
-                  <a:lnTo>
-                    <a:pt x="3436881" y="2466340"/>
-                  </a:lnTo>
-                  <a:lnTo>
-                    <a:pt x="3513350" y="2480713"/>
-                  </a:lnTo>
-                  <a:lnTo>
-                    <a:pt x="3589818" y="2494809"/>
-                  </a:lnTo>
-                  <a:lnTo>
-                    <a:pt x="3666287" y="2508633"/>
-                  </a:lnTo>
-                  <a:lnTo>
-                    <a:pt x="3742755" y="2522191"/>
-                  </a:lnTo>
-                  <a:lnTo>
-                    <a:pt x="3819224" y="2535487"/>
-                  </a:lnTo>
-                  <a:lnTo>
-                    <a:pt x="3895692" y="2548526"/>
-                  </a:lnTo>
-                  <a:lnTo>
-                    <a:pt x="3972160" y="2561314"/>
-                  </a:lnTo>
-                  <a:lnTo>
-                    <a:pt x="4048629" y="2573855"/>
-                  </a:lnTo>
-                  <a:lnTo>
-                    <a:pt x="4125097" y="2586154"/>
-                  </a:lnTo>
-                  <a:lnTo>
-                    <a:pt x="4201566" y="2598216"/>
-                  </a:lnTo>
-                  <a:lnTo>
-                    <a:pt x="4278034" y="2610046"/>
-                  </a:lnTo>
-                  <a:lnTo>
-                    <a:pt x="4354503" y="2621647"/>
-                  </a:lnTo>
-                  <a:lnTo>
-                    <a:pt x="4430971" y="2633024"/>
-                  </a:lnTo>
-                  <a:lnTo>
-                    <a:pt x="4507439" y="2644182"/>
-                  </a:lnTo>
-                  <a:lnTo>
-                    <a:pt x="4583908" y="2655125"/>
-                  </a:lnTo>
-                  <a:lnTo>
-                    <a:pt x="4660376" y="2665856"/>
-                  </a:lnTo>
-                  <a:lnTo>
-                    <a:pt x="4736845" y="2676381"/>
-                  </a:lnTo>
-                  <a:lnTo>
-                    <a:pt x="4813313" y="2686703"/>
-                  </a:lnTo>
-                  <a:lnTo>
-                    <a:pt x="4889782" y="2696825"/>
-                  </a:lnTo>
-                  <a:lnTo>
-                    <a:pt x="4966250" y="2706752"/>
-                  </a:lnTo>
-                  <a:lnTo>
-                    <a:pt x="5042719" y="2716488"/>
-                  </a:lnTo>
-                  <a:lnTo>
-                    <a:pt x="5119187" y="2726036"/>
-                  </a:lnTo>
-                  <a:lnTo>
-                    <a:pt x="5195655" y="2735399"/>
-                  </a:lnTo>
-                  <a:lnTo>
-                    <a:pt x="5272124" y="2744582"/>
-                  </a:lnTo>
-                  <a:lnTo>
-                    <a:pt x="5348592" y="2753588"/>
-                  </a:lnTo>
-                  <a:lnTo>
-                    <a:pt x="5425061" y="2762420"/>
-                  </a:lnTo>
-                  <a:lnTo>
-                    <a:pt x="5501529" y="2771082"/>
-                  </a:lnTo>
-                  <a:lnTo>
-                    <a:pt x="5577998" y="2779577"/>
-                  </a:lnTo>
-                  <a:lnTo>
-                    <a:pt x="5654466" y="2787908"/>
-                  </a:lnTo>
-                  <a:lnTo>
-                    <a:pt x="5730934" y="2796078"/>
-                  </a:lnTo>
-                  <a:lnTo>
-                    <a:pt x="5807403" y="2804090"/>
-                  </a:lnTo>
-                  <a:lnTo>
-                    <a:pt x="5883871" y="2811948"/>
-                  </a:lnTo>
-                  <a:lnTo>
-                    <a:pt x="5960340" y="2819655"/>
-                  </a:lnTo>
-                  <a:lnTo>
-                    <a:pt x="6036808" y="2827212"/>
-                  </a:lnTo>
-                  <a:lnTo>
-                    <a:pt x="6113277" y="2834624"/>
-                  </a:lnTo>
-                  <a:lnTo>
-                    <a:pt x="6189745" y="2841893"/>
-                  </a:lnTo>
-                  <a:lnTo>
-                    <a:pt x="6266213" y="2849022"/>
-                  </a:lnTo>
-                  <a:lnTo>
-                    <a:pt x="6342682" y="2856013"/>
-                  </a:lnTo>
-                  <a:lnTo>
-                    <a:pt x="6419150" y="2862869"/>
-                  </a:lnTo>
-                  <a:lnTo>
-                    <a:pt x="6495619" y="2869593"/>
-                  </a:lnTo>
-                  <a:lnTo>
-                    <a:pt x="6572087" y="2876188"/>
-                  </a:lnTo>
-                  <a:lnTo>
-                    <a:pt x="6648556" y="2882655"/>
-                  </a:lnTo>
-                  <a:lnTo>
-                    <a:pt x="6725024" y="2888997"/>
-                  </a:lnTo>
-                  <a:lnTo>
-                    <a:pt x="6801492" y="2895217"/>
-                  </a:lnTo>
-                  <a:lnTo>
-                    <a:pt x="6877961" y="2901318"/>
-                  </a:lnTo>
-                  <a:lnTo>
-                    <a:pt x="6954429" y="2907300"/>
-                  </a:lnTo>
-                  <a:lnTo>
-                    <a:pt x="7030898" y="2913167"/>
-                  </a:lnTo>
-                  <a:lnTo>
-                    <a:pt x="7107366" y="2918921"/>
-                  </a:lnTo>
-                  <a:lnTo>
-                    <a:pt x="7183835" y="2924564"/>
-                  </a:lnTo>
-                  <a:lnTo>
-                    <a:pt x="7260303" y="2930098"/>
-                  </a:lnTo>
-                  <a:lnTo>
-                    <a:pt x="7260303" y="3175414"/>
-                  </a:lnTo>
-                  <a:lnTo>
-                    <a:pt x="7183835" y="3173204"/>
-                  </a:lnTo>
-                  <a:lnTo>
-                    <a:pt x="7107366" y="3170859"/>
-                  </a:lnTo>
-                  <a:lnTo>
-                    <a:pt x="7030898" y="3168371"/>
-                  </a:lnTo>
-                  <a:lnTo>
-                    <a:pt x="6954429" y="3165729"/>
-                  </a:lnTo>
-                  <a:lnTo>
-                    <a:pt x="6877961" y="3162926"/>
-                  </a:lnTo>
-                  <a:lnTo>
-                    <a:pt x="6801492" y="3159951"/>
-                  </a:lnTo>
-                  <a:lnTo>
-                    <a:pt x="6725024" y="3156793"/>
-                  </a:lnTo>
-                  <a:lnTo>
-                    <a:pt x="6648556" y="3153442"/>
-                  </a:lnTo>
-                  <a:lnTo>
-                    <a:pt x="6572087" y="3149885"/>
-                  </a:lnTo>
-                  <a:lnTo>
-                    <a:pt x="6495619" y="3146110"/>
-                  </a:lnTo>
-                  <a:lnTo>
-                    <a:pt x="6419150" y="3142103"/>
-                  </a:lnTo>
-                  <a:lnTo>
-                    <a:pt x="6342682" y="3137851"/>
-                  </a:lnTo>
-                  <a:lnTo>
-                    <a:pt x="6266213" y="3133337"/>
-                  </a:lnTo>
-                  <a:lnTo>
-                    <a:pt x="6189745" y="3128547"/>
-                  </a:lnTo>
-                  <a:lnTo>
-                    <a:pt x="6113277" y="3123464"/>
-                  </a:lnTo>
-                  <a:lnTo>
-                    <a:pt x="6036808" y="3118068"/>
-                  </a:lnTo>
-                  <a:lnTo>
-                    <a:pt x="5960340" y="3112342"/>
-                  </a:lnTo>
-                  <a:lnTo>
-                    <a:pt x="5883871" y="3106264"/>
-                  </a:lnTo>
-                  <a:lnTo>
-                    <a:pt x="5807403" y="3099814"/>
-                  </a:lnTo>
-                  <a:lnTo>
-                    <a:pt x="5730934" y="3092968"/>
-                  </a:lnTo>
-                  <a:lnTo>
-                    <a:pt x="5654466" y="3085703"/>
-                  </a:lnTo>
-                  <a:lnTo>
-                    <a:pt x="5577998" y="3077991"/>
-                  </a:lnTo>
-                  <a:lnTo>
-                    <a:pt x="5501529" y="3069807"/>
-                  </a:lnTo>
-                  <a:lnTo>
-                    <a:pt x="5425061" y="3061121"/>
-                  </a:lnTo>
-                  <a:lnTo>
-                    <a:pt x="5348592" y="3051902"/>
-                  </a:lnTo>
-                  <a:lnTo>
-                    <a:pt x="5272124" y="3042117"/>
-                  </a:lnTo>
-                  <a:lnTo>
-                    <a:pt x="5195655" y="3031733"/>
-                  </a:lnTo>
-                  <a:lnTo>
-                    <a:pt x="5119187" y="3020712"/>
-                  </a:lnTo>
-                  <a:lnTo>
-                    <a:pt x="5042719" y="3009015"/>
-                  </a:lnTo>
-                  <a:lnTo>
-                    <a:pt x="4966250" y="2996600"/>
-                  </a:lnTo>
-                  <a:lnTo>
-                    <a:pt x="4889782" y="2983424"/>
-                  </a:lnTo>
-                  <a:lnTo>
-                    <a:pt x="4813313" y="2969440"/>
-                  </a:lnTo>
-                  <a:lnTo>
-                    <a:pt x="4736845" y="2954599"/>
-                  </a:lnTo>
-                  <a:lnTo>
-                    <a:pt x="4660376" y="2938847"/>
-                  </a:lnTo>
-                  <a:lnTo>
-                    <a:pt x="4583908" y="2922129"/>
-                  </a:lnTo>
-                  <a:lnTo>
-                    <a:pt x="4507439" y="2904386"/>
-                  </a:lnTo>
-                  <a:lnTo>
-                    <a:pt x="4430971" y="2885554"/>
-                  </a:lnTo>
-                  <a:lnTo>
-                    <a:pt x="4354503" y="2865568"/>
-                  </a:lnTo>
-                  <a:lnTo>
-                    <a:pt x="4278034" y="2844356"/>
-                  </a:lnTo>
-                  <a:lnTo>
-                    <a:pt x="4201566" y="2821843"/>
-                  </a:lnTo>
-                  <a:lnTo>
-                    <a:pt x="4125097" y="2797950"/>
-                  </a:lnTo>
-                  <a:lnTo>
-                    <a:pt x="4048629" y="2772591"/>
-                  </a:lnTo>
-                  <a:lnTo>
-                    <a:pt x="3972160" y="2745676"/>
-                  </a:lnTo>
-                  <a:lnTo>
-                    <a:pt x="3895692" y="2717111"/>
-                  </a:lnTo>
-                  <a:lnTo>
-                    <a:pt x="3819224" y="2686795"/>
-                  </a:lnTo>
-                  <a:lnTo>
-                    <a:pt x="3742755" y="2654619"/>
-                  </a:lnTo>
-                  <a:lnTo>
-                    <a:pt x="3666287" y="2620469"/>
-                  </a:lnTo>
-                  <a:lnTo>
-                    <a:pt x="3589818" y="2584225"/>
-                  </a:lnTo>
-                  <a:lnTo>
-                    <a:pt x="3513350" y="2545759"/>
-                  </a:lnTo>
-                  <a:lnTo>
-                    <a:pt x="3436881" y="2504933"/>
-                  </a:lnTo>
-                  <a:lnTo>
-                    <a:pt x="3360413" y="2461604"/>
-                  </a:lnTo>
-                  <a:lnTo>
-                    <a:pt x="3283945" y="2436739"/>
-                  </a:lnTo>
-                  <a:lnTo>
-                    <a:pt x="3207476" y="2421501"/>
-                  </a:lnTo>
-                  <a:lnTo>
-                    <a:pt x="3131008" y="2405963"/>
-                  </a:lnTo>
-                  <a:lnTo>
-                    <a:pt x="3054539" y="2390119"/>
-                  </a:lnTo>
-                  <a:lnTo>
-                    <a:pt x="2978071" y="2373964"/>
-                  </a:lnTo>
-                  <a:lnTo>
-                    <a:pt x="2901602" y="2357491"/>
-                  </a:lnTo>
-                  <a:lnTo>
-                    <a:pt x="2825134" y="2340694"/>
-                  </a:lnTo>
-                  <a:lnTo>
-                    <a:pt x="2748666" y="2323567"/>
-                  </a:lnTo>
-                  <a:lnTo>
-                    <a:pt x="2672197" y="2306102"/>
-                  </a:lnTo>
-                  <a:lnTo>
-                    <a:pt x="2595729" y="2288294"/>
-                  </a:lnTo>
-                  <a:lnTo>
-                    <a:pt x="2519260" y="2270136"/>
-                  </a:lnTo>
-                  <a:lnTo>
-                    <a:pt x="2442792" y="2251621"/>
-                  </a:lnTo>
-                  <a:lnTo>
-                    <a:pt x="2366323" y="2232741"/>
-                  </a:lnTo>
-                  <a:lnTo>
-                    <a:pt x="2289855" y="2213490"/>
-                  </a:lnTo>
-                  <a:lnTo>
-                    <a:pt x="2213386" y="2193861"/>
-                  </a:lnTo>
-                  <a:lnTo>
-                    <a:pt x="2136918" y="2173845"/>
-                  </a:lnTo>
-                  <a:lnTo>
-                    <a:pt x="2060450" y="2153436"/>
-                  </a:lnTo>
-                  <a:lnTo>
-                    <a:pt x="1983981" y="2132625"/>
-                  </a:lnTo>
-                  <a:lnTo>
-                    <a:pt x="1907513" y="2111405"/>
-                  </a:lnTo>
-                  <a:lnTo>
-                    <a:pt x="1831044" y="2089767"/>
-                  </a:lnTo>
-                  <a:lnTo>
-                    <a:pt x="1754576" y="2067704"/>
-                  </a:lnTo>
-                  <a:lnTo>
-                    <a:pt x="1678107" y="2045207"/>
-                  </a:lnTo>
-                  <a:lnTo>
-                    <a:pt x="1601639" y="2022267"/>
-                  </a:lnTo>
-                  <a:lnTo>
-                    <a:pt x="1525171" y="1998876"/>
-                  </a:lnTo>
-                  <a:lnTo>
-                    <a:pt x="1448702" y="1975025"/>
-                  </a:lnTo>
-                  <a:lnTo>
-                    <a:pt x="1372234" y="1950705"/>
-                  </a:lnTo>
-                  <a:lnTo>
-                    <a:pt x="1295765" y="1925906"/>
-                  </a:lnTo>
-                  <a:lnTo>
-                    <a:pt x="1219297" y="1900620"/>
-                  </a:lnTo>
-                  <a:lnTo>
-                    <a:pt x="1142828" y="1874836"/>
-                  </a:lnTo>
-                  <a:lnTo>
-                    <a:pt x="1066360" y="1848546"/>
-                  </a:lnTo>
-                  <a:lnTo>
-                    <a:pt x="989892" y="1821738"/>
-                  </a:lnTo>
-                  <a:lnTo>
-                    <a:pt x="913423" y="1794402"/>
-                  </a:lnTo>
-                  <a:lnTo>
-                    <a:pt x="836955" y="1766529"/>
-                  </a:lnTo>
-                  <a:lnTo>
-                    <a:pt x="760486" y="1738108"/>
-                  </a:lnTo>
-                  <a:lnTo>
-                    <a:pt x="684018" y="1709128"/>
-                  </a:lnTo>
-                  <a:lnTo>
-                    <a:pt x="607549" y="1679577"/>
-                  </a:lnTo>
-                  <a:lnTo>
-                    <a:pt x="531081" y="1649446"/>
-                  </a:lnTo>
-                  <a:lnTo>
-                    <a:pt x="454613" y="1618721"/>
-                  </a:lnTo>
-                  <a:lnTo>
-                    <a:pt x="378144" y="1587393"/>
-                  </a:lnTo>
-                  <a:lnTo>
-                    <a:pt x="301676" y="1555448"/>
-                  </a:lnTo>
-                  <a:lnTo>
-                    <a:pt x="225207" y="1522875"/>
-                  </a:lnTo>
-                  <a:lnTo>
-                    <a:pt x="148739" y="1489661"/>
-                  </a:lnTo>
-                  <a:lnTo>
-                    <a:pt x="72270" y="1455794"/>
-                  </a:lnTo>
-                  <a:lnTo>
-                    <a:pt x="0" y="1423156"/>
+                    <a:pt x="1525171" y="84262"/>
+                  </a:lnTo>
+                  <a:lnTo>
+                    <a:pt x="1601639" y="268467"/>
+                  </a:lnTo>
+                  <a:lnTo>
+                    <a:pt x="1678107" y="442028"/>
+                  </a:lnTo>
+                  <a:lnTo>
+                    <a:pt x="1754576" y="605559"/>
+                  </a:lnTo>
+                  <a:lnTo>
+                    <a:pt x="1831044" y="759641"/>
+                  </a:lnTo>
+                  <a:lnTo>
+                    <a:pt x="1907513" y="904820"/>
+                  </a:lnTo>
+                  <a:lnTo>
+                    <a:pt x="1983981" y="1041609"/>
+                  </a:lnTo>
+                  <a:lnTo>
+                    <a:pt x="2060450" y="1170493"/>
+                  </a:lnTo>
+                  <a:lnTo>
+                    <a:pt x="2136918" y="1291930"/>
+                  </a:lnTo>
+                  <a:lnTo>
+                    <a:pt x="2213386" y="1406350"/>
+                  </a:lnTo>
+                  <a:lnTo>
+                    <a:pt x="2289855" y="1514158"/>
+                  </a:lnTo>
+                  <a:lnTo>
+                    <a:pt x="2366323" y="1615736"/>
+                  </a:lnTo>
+                  <a:lnTo>
+                    <a:pt x="2442792" y="1711445"/>
+                  </a:lnTo>
+                  <a:lnTo>
+                    <a:pt x="2519260" y="1801623"/>
+                  </a:lnTo>
+                  <a:lnTo>
+                    <a:pt x="2595729" y="1886590"/>
+                  </a:lnTo>
+                  <a:lnTo>
+                    <a:pt x="2672197" y="1966647"/>
+                  </a:lnTo>
+                  <a:lnTo>
+                    <a:pt x="2748666" y="2042078"/>
+                  </a:lnTo>
+                  <a:lnTo>
+                    <a:pt x="2825134" y="2113150"/>
+                  </a:lnTo>
+                  <a:lnTo>
+                    <a:pt x="2901602" y="2180116"/>
+                  </a:lnTo>
+                  <a:lnTo>
+                    <a:pt x="2978071" y="2243211"/>
+                  </a:lnTo>
+                  <a:lnTo>
+                    <a:pt x="3054539" y="2302661"/>
+                  </a:lnTo>
+                  <a:lnTo>
+                    <a:pt x="3131008" y="2358675"/>
+                  </a:lnTo>
+                  <a:lnTo>
+                    <a:pt x="3207476" y="2411453"/>
+                  </a:lnTo>
+                  <a:lnTo>
+                    <a:pt x="3283945" y="2461181"/>
+                  </a:lnTo>
+                  <a:lnTo>
+                    <a:pt x="3360413" y="2497928"/>
+                  </a:lnTo>
+                  <a:lnTo>
+                    <a:pt x="3436881" y="2512860"/>
+                  </a:lnTo>
+                  <a:lnTo>
+                    <a:pt x="3513350" y="2527505"/>
+                  </a:lnTo>
+                  <a:lnTo>
+                    <a:pt x="3589818" y="2541867"/>
+                  </a:lnTo>
+                  <a:lnTo>
+                    <a:pt x="3666287" y="2555952"/>
+                  </a:lnTo>
+                  <a:lnTo>
+                    <a:pt x="3742755" y="2569765"/>
+                  </a:lnTo>
+                  <a:lnTo>
+                    <a:pt x="3819224" y="2583311"/>
+                  </a:lnTo>
+                  <a:lnTo>
+                    <a:pt x="3895692" y="2596597"/>
+                  </a:lnTo>
+                  <a:lnTo>
+                    <a:pt x="3972160" y="2609626"/>
+                  </a:lnTo>
+                  <a:lnTo>
+                    <a:pt x="4048629" y="2622404"/>
+                  </a:lnTo>
+                  <a:lnTo>
+                    <a:pt x="4125097" y="2634935"/>
+                  </a:lnTo>
+                  <a:lnTo>
+                    <a:pt x="4201566" y="2647225"/>
+                  </a:lnTo>
+                  <a:lnTo>
+                    <a:pt x="4278034" y="2659277"/>
+                  </a:lnTo>
+                  <a:lnTo>
+                    <a:pt x="4354503" y="2671097"/>
+                  </a:lnTo>
+                  <a:lnTo>
+                    <a:pt x="4430971" y="2682689"/>
+                  </a:lnTo>
+                  <a:lnTo>
+                    <a:pt x="4507439" y="2694057"/>
+                  </a:lnTo>
+                  <a:lnTo>
+                    <a:pt x="4583908" y="2705206"/>
+                  </a:lnTo>
+                  <a:lnTo>
+                    <a:pt x="4660376" y="2716140"/>
+                  </a:lnTo>
+                  <a:lnTo>
+                    <a:pt x="4736845" y="2726863"/>
+                  </a:lnTo>
+                  <a:lnTo>
+                    <a:pt x="4813313" y="2737380"/>
+                  </a:lnTo>
+                  <a:lnTo>
+                    <a:pt x="4889782" y="2747693"/>
+                  </a:lnTo>
+                  <a:lnTo>
+                    <a:pt x="4966250" y="2757807"/>
+                  </a:lnTo>
+                  <a:lnTo>
+                    <a:pt x="5042719" y="2767727"/>
+                  </a:lnTo>
+                  <a:lnTo>
+                    <a:pt x="5119187" y="2777455"/>
+                  </a:lnTo>
+                  <a:lnTo>
+                    <a:pt x="5195655" y="2786995"/>
+                  </a:lnTo>
+                  <a:lnTo>
+                    <a:pt x="5272124" y="2796351"/>
+                  </a:lnTo>
+                  <a:lnTo>
+                    <a:pt x="5348592" y="2805527"/>
+                  </a:lnTo>
+                  <a:lnTo>
+                    <a:pt x="5425061" y="2814526"/>
+                  </a:lnTo>
+                  <a:lnTo>
+                    <a:pt x="5501529" y="2823351"/>
+                  </a:lnTo>
+                  <a:lnTo>
+                    <a:pt x="5577998" y="2832006"/>
+                  </a:lnTo>
+                  <a:lnTo>
+                    <a:pt x="5654466" y="2840494"/>
+                  </a:lnTo>
+                  <a:lnTo>
+                    <a:pt x="5730934" y="2848818"/>
+                  </a:lnTo>
+                  <a:lnTo>
+                    <a:pt x="5807403" y="2856982"/>
+                  </a:lnTo>
+                  <a:lnTo>
+                    <a:pt x="5883871" y="2864988"/>
+                  </a:lnTo>
+                  <a:lnTo>
+                    <a:pt x="5960340" y="2872840"/>
+                  </a:lnTo>
+                  <a:lnTo>
+                    <a:pt x="6036808" y="2880540"/>
+                  </a:lnTo>
+                  <a:lnTo>
+                    <a:pt x="6113277" y="2888092"/>
+                  </a:lnTo>
+                  <a:lnTo>
+                    <a:pt x="6189745" y="2895498"/>
+                  </a:lnTo>
+                  <a:lnTo>
+                    <a:pt x="6266213" y="2902761"/>
+                  </a:lnTo>
+                  <a:lnTo>
+                    <a:pt x="6342682" y="2909884"/>
+                  </a:lnTo>
+                  <a:lnTo>
+                    <a:pt x="6419150" y="2916869"/>
+                  </a:lnTo>
+                  <a:lnTo>
+                    <a:pt x="6495619" y="2923720"/>
+                  </a:lnTo>
+                  <a:lnTo>
+                    <a:pt x="6572087" y="2930439"/>
+                  </a:lnTo>
+                  <a:lnTo>
+                    <a:pt x="6648556" y="2937028"/>
+                  </a:lnTo>
+                  <a:lnTo>
+                    <a:pt x="6725024" y="2943490"/>
+                  </a:lnTo>
+                  <a:lnTo>
+                    <a:pt x="6801492" y="2949828"/>
+                  </a:lnTo>
+                  <a:lnTo>
+                    <a:pt x="6877961" y="2956043"/>
+                  </a:lnTo>
+                  <a:lnTo>
+                    <a:pt x="6954429" y="2962138"/>
+                  </a:lnTo>
+                  <a:lnTo>
+                    <a:pt x="7030898" y="2968116"/>
+                  </a:lnTo>
+                  <a:lnTo>
+                    <a:pt x="7107366" y="2973978"/>
+                  </a:lnTo>
+                  <a:lnTo>
+                    <a:pt x="7183835" y="2979727"/>
+                  </a:lnTo>
+                  <a:lnTo>
+                    <a:pt x="7260303" y="2985366"/>
+                  </a:lnTo>
+                  <a:lnTo>
+                    <a:pt x="7260303" y="3235309"/>
+                  </a:lnTo>
+                  <a:lnTo>
+                    <a:pt x="7183835" y="3233058"/>
+                  </a:lnTo>
+                  <a:lnTo>
+                    <a:pt x="7107366" y="3230669"/>
+                  </a:lnTo>
+                  <a:lnTo>
+                    <a:pt x="7030898" y="3228133"/>
+                  </a:lnTo>
+                  <a:lnTo>
+                    <a:pt x="6954429" y="3225442"/>
+                  </a:lnTo>
+                  <a:lnTo>
+                    <a:pt x="6877961" y="3222586"/>
+                  </a:lnTo>
+                  <a:lnTo>
+                    <a:pt x="6801492" y="3219554"/>
+                  </a:lnTo>
+                  <a:lnTo>
+                    <a:pt x="6725024" y="3216337"/>
+                  </a:lnTo>
+                  <a:lnTo>
+                    <a:pt x="6648556" y="3212922"/>
+                  </a:lnTo>
+                  <a:lnTo>
+                    <a:pt x="6572087" y="3209298"/>
+                  </a:lnTo>
+                  <a:lnTo>
+                    <a:pt x="6495619" y="3205452"/>
+                  </a:lnTo>
+                  <a:lnTo>
+                    <a:pt x="6419150" y="3201370"/>
+                  </a:lnTo>
+                  <a:lnTo>
+                    <a:pt x="6342682" y="3197037"/>
+                  </a:lnTo>
+                  <a:lnTo>
+                    <a:pt x="6266213" y="3192439"/>
+                  </a:lnTo>
+                  <a:lnTo>
+                    <a:pt x="6189745" y="3187559"/>
+                  </a:lnTo>
+                  <a:lnTo>
+                    <a:pt x="6113277" y="3182379"/>
+                  </a:lnTo>
+                  <a:lnTo>
+                    <a:pt x="6036808" y="3176882"/>
+                  </a:lnTo>
+                  <a:lnTo>
+                    <a:pt x="5960340" y="3171048"/>
+                  </a:lnTo>
+                  <a:lnTo>
+                    <a:pt x="5883871" y="3164855"/>
+                  </a:lnTo>
+                  <a:lnTo>
+                    <a:pt x="5807403" y="3158283"/>
+                  </a:lnTo>
+                  <a:lnTo>
+                    <a:pt x="5730934" y="3151308"/>
+                  </a:lnTo>
+                  <a:lnTo>
+                    <a:pt x="5654466" y="3143906"/>
+                  </a:lnTo>
+                  <a:lnTo>
+                    <a:pt x="5577998" y="3136049"/>
+                  </a:lnTo>
+                  <a:lnTo>
+                    <a:pt x="5501529" y="3127710"/>
+                  </a:lnTo>
+                  <a:lnTo>
+                    <a:pt x="5425061" y="3118860"/>
+                  </a:lnTo>
+                  <a:lnTo>
+                    <a:pt x="5348592" y="3109467"/>
+                  </a:lnTo>
+                  <a:lnTo>
+                    <a:pt x="5272124" y="3099499"/>
+                  </a:lnTo>
+                  <a:lnTo>
+                    <a:pt x="5195655" y="3088918"/>
+                  </a:lnTo>
+                  <a:lnTo>
+                    <a:pt x="5119187" y="3077689"/>
+                  </a:lnTo>
+                  <a:lnTo>
+                    <a:pt x="5042719" y="3065771"/>
+                  </a:lnTo>
+                  <a:lnTo>
+                    <a:pt x="4966250" y="3053123"/>
+                  </a:lnTo>
+                  <a:lnTo>
+                    <a:pt x="4889782" y="3039698"/>
+                  </a:lnTo>
+                  <a:lnTo>
+                    <a:pt x="4813313" y="3025450"/>
+                  </a:lnTo>
+                  <a:lnTo>
+                    <a:pt x="4736845" y="3010329"/>
+                  </a:lnTo>
+                  <a:lnTo>
+                    <a:pt x="4660376" y="2994280"/>
+                  </a:lnTo>
+                  <a:lnTo>
+                    <a:pt x="4583908" y="2977247"/>
+                  </a:lnTo>
+                  <a:lnTo>
+                    <a:pt x="4507439" y="2959169"/>
+                  </a:lnTo>
+                  <a:lnTo>
+                    <a:pt x="4430971" y="2939982"/>
+                  </a:lnTo>
+                  <a:lnTo>
+                    <a:pt x="4354503" y="2919619"/>
+                  </a:lnTo>
+                  <a:lnTo>
+                    <a:pt x="4278034" y="2898007"/>
+                  </a:lnTo>
+                  <a:lnTo>
+                    <a:pt x="4201566" y="2875069"/>
+                  </a:lnTo>
+                  <a:lnTo>
+                    <a:pt x="4125097" y="2850725"/>
+                  </a:lnTo>
+                  <a:lnTo>
+                    <a:pt x="4048629" y="2824888"/>
+                  </a:lnTo>
+                  <a:lnTo>
+                    <a:pt x="3972160" y="2797466"/>
+                  </a:lnTo>
+                  <a:lnTo>
+                    <a:pt x="3895692" y="2768362"/>
+                  </a:lnTo>
+                  <a:lnTo>
+                    <a:pt x="3819224" y="2737474"/>
+                  </a:lnTo>
+                  <a:lnTo>
+                    <a:pt x="3742755" y="2704691"/>
+                  </a:lnTo>
+                  <a:lnTo>
+                    <a:pt x="3666287" y="2669897"/>
+                  </a:lnTo>
+                  <a:lnTo>
+                    <a:pt x="3589818" y="2632970"/>
+                  </a:lnTo>
+                  <a:lnTo>
+                    <a:pt x="3513350" y="2593778"/>
+                  </a:lnTo>
+                  <a:lnTo>
+                    <a:pt x="3436881" y="2552182"/>
+                  </a:lnTo>
+                  <a:lnTo>
+                    <a:pt x="3360413" y="2508035"/>
+                  </a:lnTo>
+                  <a:lnTo>
+                    <a:pt x="3283945" y="2482702"/>
+                  </a:lnTo>
+                  <a:lnTo>
+                    <a:pt x="3207476" y="2467176"/>
+                  </a:lnTo>
+                  <a:lnTo>
+                    <a:pt x="3131008" y="2451345"/>
+                  </a:lnTo>
+                  <a:lnTo>
+                    <a:pt x="3054539" y="2435202"/>
+                  </a:lnTo>
+                  <a:lnTo>
+                    <a:pt x="2978071" y="2418742"/>
+                  </a:lnTo>
+                  <a:lnTo>
+                    <a:pt x="2901602" y="2401959"/>
+                  </a:lnTo>
+                  <a:lnTo>
+                    <a:pt x="2825134" y="2384845"/>
+                  </a:lnTo>
+                  <a:lnTo>
+                    <a:pt x="2748666" y="2367394"/>
+                  </a:lnTo>
+                  <a:lnTo>
+                    <a:pt x="2672197" y="2349600"/>
+                  </a:lnTo>
+                  <a:lnTo>
+                    <a:pt x="2595729" y="2331457"/>
+                  </a:lnTo>
+                  <a:lnTo>
+                    <a:pt x="2519260" y="2312956"/>
+                  </a:lnTo>
+                  <a:lnTo>
+                    <a:pt x="2442792" y="2294091"/>
+                  </a:lnTo>
+                  <a:lnTo>
+                    <a:pt x="2366323" y="2274856"/>
+                  </a:lnTo>
+                  <a:lnTo>
+                    <a:pt x="2289855" y="2255242"/>
+                  </a:lnTo>
+                  <a:lnTo>
+                    <a:pt x="2213386" y="2235242"/>
+                  </a:lnTo>
+                  <a:lnTo>
+                    <a:pt x="2136918" y="2214849"/>
+                  </a:lnTo>
+                  <a:lnTo>
+                    <a:pt x="2060450" y="2194054"/>
+                  </a:lnTo>
+                  <a:lnTo>
+                    <a:pt x="1983981" y="2172851"/>
+                  </a:lnTo>
+                  <a:lnTo>
+                    <a:pt x="1907513" y="2151230"/>
+                  </a:lnTo>
+                  <a:lnTo>
+                    <a:pt x="1831044" y="2129185"/>
+                  </a:lnTo>
+                  <a:lnTo>
+                    <a:pt x="1754576" y="2106705"/>
+                  </a:lnTo>
+                  <a:lnTo>
+                    <a:pt x="1678107" y="2083784"/>
+                  </a:lnTo>
+                  <a:lnTo>
+                    <a:pt x="1601639" y="2060411"/>
+                  </a:lnTo>
+                  <a:lnTo>
+                    <a:pt x="1525171" y="2036579"/>
+                  </a:lnTo>
+                  <a:lnTo>
+                    <a:pt x="1448702" y="2012278"/>
+                  </a:lnTo>
+                  <a:lnTo>
+                    <a:pt x="1372234" y="1987500"/>
+                  </a:lnTo>
+                  <a:lnTo>
+                    <a:pt x="1295765" y="1962233"/>
+                  </a:lnTo>
+                  <a:lnTo>
+                    <a:pt x="1219297" y="1936470"/>
+                  </a:lnTo>
+                  <a:lnTo>
+                    <a:pt x="1142828" y="1910200"/>
+                  </a:lnTo>
+                  <a:lnTo>
+                    <a:pt x="1066360" y="1883413"/>
+                  </a:lnTo>
+                  <a:lnTo>
+                    <a:pt x="989892" y="1856100"/>
+                  </a:lnTo>
+                  <a:lnTo>
+                    <a:pt x="913423" y="1828249"/>
+                  </a:lnTo>
+                  <a:lnTo>
+                    <a:pt x="836955" y="1799850"/>
+                  </a:lnTo>
+                  <a:lnTo>
+                    <a:pt x="760486" y="1770893"/>
+                  </a:lnTo>
+                  <a:lnTo>
+                    <a:pt x="684018" y="1741366"/>
+                  </a:lnTo>
+                  <a:lnTo>
+                    <a:pt x="607549" y="1711258"/>
+                  </a:lnTo>
+                  <a:lnTo>
+                    <a:pt x="531081" y="1680558"/>
+                  </a:lnTo>
+                  <a:lnTo>
+                    <a:pt x="454613" y="1649254"/>
+                  </a:lnTo>
+                  <a:lnTo>
+                    <a:pt x="378144" y="1617335"/>
+                  </a:lnTo>
+                  <a:lnTo>
+                    <a:pt x="301676" y="1584787"/>
+                  </a:lnTo>
+                  <a:lnTo>
+                    <a:pt x="225207" y="1551600"/>
+                  </a:lnTo>
+                  <a:lnTo>
+                    <a:pt x="148739" y="1517759"/>
+                  </a:lnTo>
+                  <a:lnTo>
+                    <a:pt x="72270" y="1483253"/>
+                  </a:lnTo>
+                  <a:lnTo>
+                    <a:pt x="0" y="1450000"/>
                   </a:lnTo>
                   <a:close/>
                 </a:path>
@@ -3546,249 +3933,249 @@
         </p:sp>
         <p:sp>
           <p:nvSpPr>
-            <p:cNvPr id="22" name="pl22"/>
+            <p:cNvPr id="31" name="pl31"/>
             <p:cNvSpPr/>
             <p:nvPr/>
           </p:nvSpPr>
           <p:spPr>
             <a:xfrm>
-              <a:off x="2407858" y="2209169"/>
-              <a:ext cx="5768090" cy="2930098"/>
+              <a:off x="2407858" y="2185486"/>
+              <a:ext cx="5768090" cy="2985366"/>
             </a:xfrm>
             <a:custGeom>
               <a:avLst/>
               <a:pathLst>
-                <a:path w="5768090" h="2930098">
+                <a:path w="5768090" h="2985366">
                   <a:moveTo>
                     <a:pt x="0" y="0"/>
                   </a:moveTo>
                   <a:lnTo>
-                    <a:pt x="32958" y="82702"/>
-                  </a:lnTo>
-                  <a:lnTo>
-                    <a:pt x="109426" y="263497"/>
-                  </a:lnTo>
-                  <a:lnTo>
-                    <a:pt x="185894" y="433845"/>
-                  </a:lnTo>
-                  <a:lnTo>
-                    <a:pt x="262363" y="594349"/>
-                  </a:lnTo>
-                  <a:lnTo>
-                    <a:pt x="338831" y="745578"/>
-                  </a:lnTo>
-                  <a:lnTo>
-                    <a:pt x="415300" y="888069"/>
-                  </a:lnTo>
-                  <a:lnTo>
-                    <a:pt x="491768" y="1022325"/>
-                  </a:lnTo>
-                  <a:lnTo>
-                    <a:pt x="568237" y="1148824"/>
-                  </a:lnTo>
-                  <a:lnTo>
-                    <a:pt x="644705" y="1268013"/>
-                  </a:lnTo>
-                  <a:lnTo>
-                    <a:pt x="721173" y="1380314"/>
-                  </a:lnTo>
-                  <a:lnTo>
-                    <a:pt x="797642" y="1486127"/>
-                  </a:lnTo>
-                  <a:lnTo>
-                    <a:pt x="874110" y="1585824"/>
-                  </a:lnTo>
-                  <a:lnTo>
-                    <a:pt x="950579" y="1679761"/>
-                  </a:lnTo>
-                  <a:lnTo>
-                    <a:pt x="1027047" y="1768269"/>
-                  </a:lnTo>
-                  <a:lnTo>
-                    <a:pt x="1103516" y="1851664"/>
-                  </a:lnTo>
-                  <a:lnTo>
-                    <a:pt x="1179984" y="1930239"/>
-                  </a:lnTo>
-                  <a:lnTo>
-                    <a:pt x="1256453" y="2004273"/>
-                  </a:lnTo>
-                  <a:lnTo>
-                    <a:pt x="1332921" y="2074030"/>
-                  </a:lnTo>
-                  <a:lnTo>
-                    <a:pt x="1409389" y="2139755"/>
-                  </a:lnTo>
-                  <a:lnTo>
-                    <a:pt x="1485858" y="2201683"/>
-                  </a:lnTo>
-                  <a:lnTo>
-                    <a:pt x="1562326" y="2260032"/>
-                  </a:lnTo>
-                  <a:lnTo>
-                    <a:pt x="1638795" y="2315009"/>
-                  </a:lnTo>
-                  <a:lnTo>
-                    <a:pt x="1715263" y="2366810"/>
-                  </a:lnTo>
-                  <a:lnTo>
-                    <a:pt x="1791732" y="2415617"/>
-                  </a:lnTo>
-                  <a:lnTo>
-                    <a:pt x="1868200" y="2451684"/>
-                  </a:lnTo>
-                  <a:lnTo>
-                    <a:pt x="1944668" y="2466340"/>
-                  </a:lnTo>
-                  <a:lnTo>
-                    <a:pt x="2021137" y="2480713"/>
-                  </a:lnTo>
-                  <a:lnTo>
-                    <a:pt x="2097605" y="2494809"/>
-                  </a:lnTo>
-                  <a:lnTo>
-                    <a:pt x="2174074" y="2508633"/>
-                  </a:lnTo>
-                  <a:lnTo>
-                    <a:pt x="2250542" y="2522191"/>
-                  </a:lnTo>
-                  <a:lnTo>
-                    <a:pt x="2327011" y="2535487"/>
-                  </a:lnTo>
-                  <a:lnTo>
-                    <a:pt x="2403479" y="2548526"/>
-                  </a:lnTo>
-                  <a:lnTo>
-                    <a:pt x="2479947" y="2561314"/>
-                  </a:lnTo>
-                  <a:lnTo>
-                    <a:pt x="2556416" y="2573855"/>
-                  </a:lnTo>
-                  <a:lnTo>
-                    <a:pt x="2632884" y="2586154"/>
-                  </a:lnTo>
-                  <a:lnTo>
-                    <a:pt x="2709353" y="2598216"/>
-                  </a:lnTo>
-                  <a:lnTo>
-                    <a:pt x="2785821" y="2610046"/>
-                  </a:lnTo>
-                  <a:lnTo>
-                    <a:pt x="2862290" y="2621647"/>
-                  </a:lnTo>
-                  <a:lnTo>
-                    <a:pt x="2938758" y="2633024"/>
-                  </a:lnTo>
-                  <a:lnTo>
-                    <a:pt x="3015226" y="2644182"/>
-                  </a:lnTo>
-                  <a:lnTo>
-                    <a:pt x="3091695" y="2655125"/>
-                  </a:lnTo>
-                  <a:lnTo>
-                    <a:pt x="3168163" y="2665856"/>
-                  </a:lnTo>
-                  <a:lnTo>
-                    <a:pt x="3244632" y="2676381"/>
-                  </a:lnTo>
-                  <a:lnTo>
-                    <a:pt x="3321100" y="2686703"/>
-                  </a:lnTo>
-                  <a:lnTo>
-                    <a:pt x="3397569" y="2696825"/>
-                  </a:lnTo>
-                  <a:lnTo>
-                    <a:pt x="3474037" y="2706752"/>
-                  </a:lnTo>
-                  <a:lnTo>
-                    <a:pt x="3550506" y="2716488"/>
-                  </a:lnTo>
-                  <a:lnTo>
-                    <a:pt x="3626974" y="2726036"/>
-                  </a:lnTo>
-                  <a:lnTo>
-                    <a:pt x="3703442" y="2735399"/>
-                  </a:lnTo>
-                  <a:lnTo>
-                    <a:pt x="3779911" y="2744582"/>
-                  </a:lnTo>
-                  <a:lnTo>
-                    <a:pt x="3856379" y="2753588"/>
-                  </a:lnTo>
-                  <a:lnTo>
-                    <a:pt x="3932848" y="2762420"/>
-                  </a:lnTo>
-                  <a:lnTo>
-                    <a:pt x="4009316" y="2771082"/>
-                  </a:lnTo>
-                  <a:lnTo>
-                    <a:pt x="4085785" y="2779577"/>
-                  </a:lnTo>
-                  <a:lnTo>
-                    <a:pt x="4162253" y="2787908"/>
-                  </a:lnTo>
-                  <a:lnTo>
-                    <a:pt x="4238721" y="2796078"/>
-                  </a:lnTo>
-                  <a:lnTo>
-                    <a:pt x="4315190" y="2804090"/>
-                  </a:lnTo>
-                  <a:lnTo>
-                    <a:pt x="4391658" y="2811948"/>
-                  </a:lnTo>
-                  <a:lnTo>
-                    <a:pt x="4468127" y="2819655"/>
-                  </a:lnTo>
-                  <a:lnTo>
-                    <a:pt x="4544595" y="2827212"/>
-                  </a:lnTo>
-                  <a:lnTo>
-                    <a:pt x="4621064" y="2834624"/>
-                  </a:lnTo>
-                  <a:lnTo>
-                    <a:pt x="4697532" y="2841893"/>
-                  </a:lnTo>
-                  <a:lnTo>
-                    <a:pt x="4774000" y="2849022"/>
-                  </a:lnTo>
-                  <a:lnTo>
-                    <a:pt x="4850469" y="2856013"/>
-                  </a:lnTo>
-                  <a:lnTo>
-                    <a:pt x="4926937" y="2862869"/>
-                  </a:lnTo>
-                  <a:lnTo>
-                    <a:pt x="5003406" y="2869593"/>
-                  </a:lnTo>
-                  <a:lnTo>
-                    <a:pt x="5079874" y="2876188"/>
-                  </a:lnTo>
-                  <a:lnTo>
-                    <a:pt x="5156343" y="2882655"/>
-                  </a:lnTo>
-                  <a:lnTo>
-                    <a:pt x="5232811" y="2888997"/>
-                  </a:lnTo>
-                  <a:lnTo>
-                    <a:pt x="5309279" y="2895217"/>
-                  </a:lnTo>
-                  <a:lnTo>
-                    <a:pt x="5385748" y="2901318"/>
-                  </a:lnTo>
-                  <a:lnTo>
-                    <a:pt x="5462216" y="2907300"/>
-                  </a:lnTo>
-                  <a:lnTo>
-                    <a:pt x="5538685" y="2913167"/>
-                  </a:lnTo>
-                  <a:lnTo>
-                    <a:pt x="5615153" y="2918921"/>
-                  </a:lnTo>
-                  <a:lnTo>
-                    <a:pt x="5691622" y="2924564"/>
-                  </a:lnTo>
-                  <a:lnTo>
-                    <a:pt x="5768090" y="2930098"/>
+                    <a:pt x="32958" y="84262"/>
+                  </a:lnTo>
+                  <a:lnTo>
+                    <a:pt x="109426" y="268467"/>
+                  </a:lnTo>
+                  <a:lnTo>
+                    <a:pt x="185894" y="442028"/>
+                  </a:lnTo>
+                  <a:lnTo>
+                    <a:pt x="262363" y="605559"/>
+                  </a:lnTo>
+                  <a:lnTo>
+                    <a:pt x="338831" y="759641"/>
+                  </a:lnTo>
+                  <a:lnTo>
+                    <a:pt x="415300" y="904820"/>
+                  </a:lnTo>
+                  <a:lnTo>
+                    <a:pt x="491768" y="1041609"/>
+                  </a:lnTo>
+                  <a:lnTo>
+                    <a:pt x="568237" y="1170493"/>
+                  </a:lnTo>
+                  <a:lnTo>
+                    <a:pt x="644705" y="1291930"/>
+                  </a:lnTo>
+                  <a:lnTo>
+                    <a:pt x="721173" y="1406350"/>
+                  </a:lnTo>
+                  <a:lnTo>
+                    <a:pt x="797642" y="1514158"/>
+                  </a:lnTo>
+                  <a:lnTo>
+                    <a:pt x="874110" y="1615736"/>
+                  </a:lnTo>
+                  <a:lnTo>
+                    <a:pt x="950579" y="1711445"/>
+                  </a:lnTo>
+                  <a:lnTo>
+                    <a:pt x="1027047" y="1801623"/>
+                  </a:lnTo>
+                  <a:lnTo>
+                    <a:pt x="1103516" y="1886590"/>
+                  </a:lnTo>
+                  <a:lnTo>
+                    <a:pt x="1179984" y="1966647"/>
+                  </a:lnTo>
+                  <a:lnTo>
+                    <a:pt x="1256453" y="2042078"/>
+                  </a:lnTo>
+                  <a:lnTo>
+                    <a:pt x="1332921" y="2113150"/>
+                  </a:lnTo>
+                  <a:lnTo>
+                    <a:pt x="1409389" y="2180116"/>
+                  </a:lnTo>
+                  <a:lnTo>
+                    <a:pt x="1485858" y="2243211"/>
+                  </a:lnTo>
+                  <a:lnTo>
+                    <a:pt x="1562326" y="2302661"/>
+                  </a:lnTo>
+                  <a:lnTo>
+                    <a:pt x="1638795" y="2358675"/>
+                  </a:lnTo>
+                  <a:lnTo>
+                    <a:pt x="1715263" y="2411453"/>
+                  </a:lnTo>
+                  <a:lnTo>
+                    <a:pt x="1791732" y="2461181"/>
+                  </a:lnTo>
+                  <a:lnTo>
+                    <a:pt x="1868200" y="2497928"/>
+                  </a:lnTo>
+                  <a:lnTo>
+                    <a:pt x="1944668" y="2512860"/>
+                  </a:lnTo>
+                  <a:lnTo>
+                    <a:pt x="2021137" y="2527505"/>
+                  </a:lnTo>
+                  <a:lnTo>
+                    <a:pt x="2097605" y="2541867"/>
+                  </a:lnTo>
+                  <a:lnTo>
+                    <a:pt x="2174074" y="2555952"/>
+                  </a:lnTo>
+                  <a:lnTo>
+                    <a:pt x="2250542" y="2569765"/>
+                  </a:lnTo>
+                  <a:lnTo>
+                    <a:pt x="2327011" y="2583311"/>
+                  </a:lnTo>
+                  <a:lnTo>
+                    <a:pt x="2403479" y="2596597"/>
+                  </a:lnTo>
+                  <a:lnTo>
+                    <a:pt x="2479947" y="2609626"/>
+                  </a:lnTo>
+                  <a:lnTo>
+                    <a:pt x="2556416" y="2622404"/>
+                  </a:lnTo>
+                  <a:lnTo>
+                    <a:pt x="2632884" y="2634935"/>
+                  </a:lnTo>
+                  <a:lnTo>
+                    <a:pt x="2709353" y="2647225"/>
+                  </a:lnTo>
+                  <a:lnTo>
+                    <a:pt x="2785821" y="2659277"/>
+                  </a:lnTo>
+                  <a:lnTo>
+                    <a:pt x="2862290" y="2671097"/>
+                  </a:lnTo>
+                  <a:lnTo>
+                    <a:pt x="2938758" y="2682689"/>
+                  </a:lnTo>
+                  <a:lnTo>
+                    <a:pt x="3015226" y="2694057"/>
+                  </a:lnTo>
+                  <a:lnTo>
+                    <a:pt x="3091695" y="2705206"/>
+                  </a:lnTo>
+                  <a:lnTo>
+                    <a:pt x="3168163" y="2716140"/>
+                  </a:lnTo>
+                  <a:lnTo>
+                    <a:pt x="3244632" y="2726863"/>
+                  </a:lnTo>
+                  <a:lnTo>
+                    <a:pt x="3321100" y="2737380"/>
+                  </a:lnTo>
+                  <a:lnTo>
+                    <a:pt x="3397569" y="2747693"/>
+                  </a:lnTo>
+                  <a:lnTo>
+                    <a:pt x="3474037" y="2757807"/>
+                  </a:lnTo>
+                  <a:lnTo>
+                    <a:pt x="3550506" y="2767727"/>
+                  </a:lnTo>
+                  <a:lnTo>
+                    <a:pt x="3626974" y="2777455"/>
+                  </a:lnTo>
+                  <a:lnTo>
+                    <a:pt x="3703442" y="2786995"/>
+                  </a:lnTo>
+                  <a:lnTo>
+                    <a:pt x="3779911" y="2796351"/>
+                  </a:lnTo>
+                  <a:lnTo>
+                    <a:pt x="3856379" y="2805527"/>
+                  </a:lnTo>
+                  <a:lnTo>
+                    <a:pt x="3932848" y="2814526"/>
+                  </a:lnTo>
+                  <a:lnTo>
+                    <a:pt x="4009316" y="2823351"/>
+                  </a:lnTo>
+                  <a:lnTo>
+                    <a:pt x="4085785" y="2832006"/>
+                  </a:lnTo>
+                  <a:lnTo>
+                    <a:pt x="4162253" y="2840494"/>
+                  </a:lnTo>
+                  <a:lnTo>
+                    <a:pt x="4238721" y="2848818"/>
+                  </a:lnTo>
+                  <a:lnTo>
+                    <a:pt x="4315190" y="2856982"/>
+                  </a:lnTo>
+                  <a:lnTo>
+                    <a:pt x="4391658" y="2864988"/>
+                  </a:lnTo>
+                  <a:lnTo>
+                    <a:pt x="4468127" y="2872840"/>
+                  </a:lnTo>
+                  <a:lnTo>
+                    <a:pt x="4544595" y="2880540"/>
+                  </a:lnTo>
+                  <a:lnTo>
+                    <a:pt x="4621064" y="2888092"/>
+                  </a:lnTo>
+                  <a:lnTo>
+                    <a:pt x="4697532" y="2895498"/>
+                  </a:lnTo>
+                  <a:lnTo>
+                    <a:pt x="4774000" y="2902761"/>
+                  </a:lnTo>
+                  <a:lnTo>
+                    <a:pt x="4850469" y="2909884"/>
+                  </a:lnTo>
+                  <a:lnTo>
+                    <a:pt x="4926937" y="2916869"/>
+                  </a:lnTo>
+                  <a:lnTo>
+                    <a:pt x="5003406" y="2923720"/>
+                  </a:lnTo>
+                  <a:lnTo>
+                    <a:pt x="5079874" y="2930439"/>
+                  </a:lnTo>
+                  <a:lnTo>
+                    <a:pt x="5156343" y="2937028"/>
+                  </a:lnTo>
+                  <a:lnTo>
+                    <a:pt x="5232811" y="2943490"/>
+                  </a:lnTo>
+                  <a:lnTo>
+                    <a:pt x="5309279" y="2949828"/>
+                  </a:lnTo>
+                  <a:lnTo>
+                    <a:pt x="5385748" y="2956043"/>
+                  </a:lnTo>
+                  <a:lnTo>
+                    <a:pt x="5462216" y="2962138"/>
+                  </a:lnTo>
+                  <a:lnTo>
+                    <a:pt x="5538685" y="2968116"/>
+                  </a:lnTo>
+                  <a:lnTo>
+                    <a:pt x="5615153" y="2973978"/>
+                  </a:lnTo>
+                  <a:lnTo>
+                    <a:pt x="5691622" y="2979727"/>
+                  </a:lnTo>
+                  <a:lnTo>
+                    <a:pt x="5768090" y="2985366"/>
                   </a:lnTo>
                 </a:path>
               </a:pathLst>
@@ -3802,303 +4189,303 @@
         </p:sp>
         <p:sp>
           <p:nvSpPr>
-            <p:cNvPr id="23" name="pl23"/>
+            <p:cNvPr id="32" name="pl32"/>
             <p:cNvSpPr/>
             <p:nvPr/>
           </p:nvSpPr>
           <p:spPr>
             <a:xfrm>
-              <a:off x="915645" y="3632325"/>
-              <a:ext cx="7260303" cy="1752257"/>
+              <a:off x="915645" y="3635486"/>
+              <a:ext cx="7260303" cy="1785309"/>
             </a:xfrm>
             <a:custGeom>
               <a:avLst/>
               <a:pathLst>
-                <a:path w="7260303" h="1752257">
+                <a:path w="7260303" h="1785309">
                   <a:moveTo>
-                    <a:pt x="7260303" y="1752257"/>
+                    <a:pt x="7260303" y="1785309"/>
                   </a:moveTo>
                   <a:lnTo>
-                    <a:pt x="7183835" y="1750048"/>
-                  </a:lnTo>
-                  <a:lnTo>
-                    <a:pt x="7107366" y="1747703"/>
-                  </a:lnTo>
-                  <a:lnTo>
-                    <a:pt x="7030898" y="1745214"/>
-                  </a:lnTo>
-                  <a:lnTo>
-                    <a:pt x="6954429" y="1742573"/>
-                  </a:lnTo>
-                  <a:lnTo>
-                    <a:pt x="6877961" y="1739770"/>
-                  </a:lnTo>
-                  <a:lnTo>
-                    <a:pt x="6801492" y="1736794"/>
-                  </a:lnTo>
-                  <a:lnTo>
-                    <a:pt x="6725024" y="1733637"/>
-                  </a:lnTo>
-                  <a:lnTo>
-                    <a:pt x="6648556" y="1730285"/>
-                  </a:lnTo>
-                  <a:lnTo>
-                    <a:pt x="6572087" y="1726728"/>
-                  </a:lnTo>
-                  <a:lnTo>
-                    <a:pt x="6495619" y="1722953"/>
-                  </a:lnTo>
-                  <a:lnTo>
-                    <a:pt x="6419150" y="1718946"/>
-                  </a:lnTo>
-                  <a:lnTo>
-                    <a:pt x="6342682" y="1714694"/>
-                  </a:lnTo>
-                  <a:lnTo>
-                    <a:pt x="6266213" y="1710181"/>
-                  </a:lnTo>
-                  <a:lnTo>
-                    <a:pt x="6189745" y="1705391"/>
-                  </a:lnTo>
-                  <a:lnTo>
-                    <a:pt x="6113277" y="1700307"/>
-                  </a:lnTo>
-                  <a:lnTo>
-                    <a:pt x="6036808" y="1694912"/>
-                  </a:lnTo>
-                  <a:lnTo>
-                    <a:pt x="5960340" y="1689186"/>
-                  </a:lnTo>
-                  <a:lnTo>
-                    <a:pt x="5883871" y="1683108"/>
-                  </a:lnTo>
-                  <a:lnTo>
-                    <a:pt x="5807403" y="1676658"/>
-                  </a:lnTo>
-                  <a:lnTo>
-                    <a:pt x="5730934" y="1669812"/>
-                  </a:lnTo>
-                  <a:lnTo>
-                    <a:pt x="5654466" y="1662546"/>
-                  </a:lnTo>
-                  <a:lnTo>
-                    <a:pt x="5577998" y="1654835"/>
-                  </a:lnTo>
-                  <a:lnTo>
-                    <a:pt x="5501529" y="1646650"/>
-                  </a:lnTo>
-                  <a:lnTo>
-                    <a:pt x="5425061" y="1637964"/>
-                  </a:lnTo>
-                  <a:lnTo>
-                    <a:pt x="5348592" y="1628745"/>
-                  </a:lnTo>
-                  <a:lnTo>
-                    <a:pt x="5272124" y="1618961"/>
-                  </a:lnTo>
-                  <a:lnTo>
-                    <a:pt x="5195655" y="1608577"/>
-                  </a:lnTo>
-                  <a:lnTo>
-                    <a:pt x="5119187" y="1597555"/>
-                  </a:lnTo>
-                  <a:lnTo>
-                    <a:pt x="5042719" y="1585858"/>
-                  </a:lnTo>
-                  <a:lnTo>
-                    <a:pt x="4966250" y="1573444"/>
-                  </a:lnTo>
-                  <a:lnTo>
-                    <a:pt x="4889782" y="1560268"/>
-                  </a:lnTo>
-                  <a:lnTo>
-                    <a:pt x="4813313" y="1546284"/>
-                  </a:lnTo>
-                  <a:lnTo>
-                    <a:pt x="4736845" y="1531442"/>
-                  </a:lnTo>
-                  <a:lnTo>
-                    <a:pt x="4660376" y="1515690"/>
-                  </a:lnTo>
-                  <a:lnTo>
-                    <a:pt x="4583908" y="1498973"/>
-                  </a:lnTo>
-                  <a:lnTo>
-                    <a:pt x="4507439" y="1481229"/>
-                  </a:lnTo>
-                  <a:lnTo>
-                    <a:pt x="4430971" y="1462398"/>
-                  </a:lnTo>
-                  <a:lnTo>
-                    <a:pt x="4354503" y="1442412"/>
-                  </a:lnTo>
-                  <a:lnTo>
-                    <a:pt x="4278034" y="1421200"/>
-                  </a:lnTo>
-                  <a:lnTo>
-                    <a:pt x="4201566" y="1398687"/>
-                  </a:lnTo>
-                  <a:lnTo>
-                    <a:pt x="4125097" y="1374793"/>
-                  </a:lnTo>
-                  <a:lnTo>
-                    <a:pt x="4048629" y="1349434"/>
-                  </a:lnTo>
-                  <a:lnTo>
-                    <a:pt x="3972160" y="1322520"/>
-                  </a:lnTo>
-                  <a:lnTo>
-                    <a:pt x="3895692" y="1293955"/>
-                  </a:lnTo>
-                  <a:lnTo>
-                    <a:pt x="3819224" y="1263638"/>
-                  </a:lnTo>
-                  <a:lnTo>
-                    <a:pt x="3742755" y="1231462"/>
-                  </a:lnTo>
-                  <a:lnTo>
-                    <a:pt x="3666287" y="1197313"/>
-                  </a:lnTo>
-                  <a:lnTo>
-                    <a:pt x="3589818" y="1161069"/>
-                  </a:lnTo>
-                  <a:lnTo>
-                    <a:pt x="3513350" y="1122603"/>
-                  </a:lnTo>
-                  <a:lnTo>
-                    <a:pt x="3436881" y="1081777"/>
-                  </a:lnTo>
-                  <a:lnTo>
-                    <a:pt x="3360413" y="1038447"/>
-                  </a:lnTo>
-                  <a:lnTo>
-                    <a:pt x="3283945" y="1013583"/>
-                  </a:lnTo>
-                  <a:lnTo>
-                    <a:pt x="3207476" y="998345"/>
-                  </a:lnTo>
-                  <a:lnTo>
-                    <a:pt x="3131008" y="982807"/>
-                  </a:lnTo>
-                  <a:lnTo>
-                    <a:pt x="3054539" y="966963"/>
-                  </a:lnTo>
-                  <a:lnTo>
-                    <a:pt x="2978071" y="950808"/>
-                  </a:lnTo>
-                  <a:lnTo>
-                    <a:pt x="2901602" y="934335"/>
-                  </a:lnTo>
-                  <a:lnTo>
-                    <a:pt x="2825134" y="917538"/>
-                  </a:lnTo>
-                  <a:lnTo>
-                    <a:pt x="2748666" y="900410"/>
-                  </a:lnTo>
-                  <a:lnTo>
-                    <a:pt x="2672197" y="882946"/>
-                  </a:lnTo>
-                  <a:lnTo>
-                    <a:pt x="2595729" y="865138"/>
-                  </a:lnTo>
-                  <a:lnTo>
-                    <a:pt x="2519260" y="846980"/>
-                  </a:lnTo>
-                  <a:lnTo>
-                    <a:pt x="2442792" y="828464"/>
-                  </a:lnTo>
-                  <a:lnTo>
-                    <a:pt x="2366323" y="809585"/>
-                  </a:lnTo>
-                  <a:lnTo>
-                    <a:pt x="2289855" y="790334"/>
-                  </a:lnTo>
-                  <a:lnTo>
-                    <a:pt x="2213386" y="770704"/>
-                  </a:lnTo>
-                  <a:lnTo>
-                    <a:pt x="2136918" y="750689"/>
-                  </a:lnTo>
-                  <a:lnTo>
-                    <a:pt x="2060450" y="730279"/>
-                  </a:lnTo>
-                  <a:lnTo>
-                    <a:pt x="1983981" y="709468"/>
-                  </a:lnTo>
-                  <a:lnTo>
-                    <a:pt x="1907513" y="688248"/>
-                  </a:lnTo>
-                  <a:lnTo>
-                    <a:pt x="1831044" y="666611"/>
-                  </a:lnTo>
-                  <a:lnTo>
-                    <a:pt x="1754576" y="644547"/>
-                  </a:lnTo>
-                  <a:lnTo>
-                    <a:pt x="1678107" y="622050"/>
-                  </a:lnTo>
-                  <a:lnTo>
-                    <a:pt x="1601639" y="599111"/>
-                  </a:lnTo>
-                  <a:lnTo>
-                    <a:pt x="1525171" y="575720"/>
-                  </a:lnTo>
-                  <a:lnTo>
-                    <a:pt x="1448702" y="551869"/>
-                  </a:lnTo>
-                  <a:lnTo>
-                    <a:pt x="1372234" y="527548"/>
-                  </a:lnTo>
-                  <a:lnTo>
-                    <a:pt x="1295765" y="502750"/>
-                  </a:lnTo>
-                  <a:lnTo>
-                    <a:pt x="1219297" y="477464"/>
-                  </a:lnTo>
-                  <a:lnTo>
-                    <a:pt x="1142828" y="451680"/>
-                  </a:lnTo>
-                  <a:lnTo>
-                    <a:pt x="1066360" y="425389"/>
-                  </a:lnTo>
-                  <a:lnTo>
-                    <a:pt x="989892" y="398581"/>
-                  </a:lnTo>
-                  <a:lnTo>
-                    <a:pt x="913423" y="371246"/>
-                  </a:lnTo>
-                  <a:lnTo>
-                    <a:pt x="836955" y="343373"/>
-                  </a:lnTo>
-                  <a:lnTo>
-                    <a:pt x="760486" y="314952"/>
-                  </a:lnTo>
-                  <a:lnTo>
-                    <a:pt x="684018" y="285971"/>
-                  </a:lnTo>
-                  <a:lnTo>
-                    <a:pt x="607549" y="256421"/>
-                  </a:lnTo>
-                  <a:lnTo>
-                    <a:pt x="531081" y="226289"/>
-                  </a:lnTo>
-                  <a:lnTo>
-                    <a:pt x="454613" y="195565"/>
-                  </a:lnTo>
-                  <a:lnTo>
-                    <a:pt x="378144" y="164236"/>
-                  </a:lnTo>
-                  <a:lnTo>
-                    <a:pt x="301676" y="132292"/>
-                  </a:lnTo>
-                  <a:lnTo>
-                    <a:pt x="225207" y="99718"/>
-                  </a:lnTo>
-                  <a:lnTo>
-                    <a:pt x="148739" y="66504"/>
-                  </a:lnTo>
-                  <a:lnTo>
-                    <a:pt x="72270" y="32637"/>
+                    <a:pt x="7183835" y="1783058"/>
+                  </a:lnTo>
+                  <a:lnTo>
+                    <a:pt x="7107366" y="1780669"/>
+                  </a:lnTo>
+                  <a:lnTo>
+                    <a:pt x="7030898" y="1778133"/>
+                  </a:lnTo>
+                  <a:lnTo>
+                    <a:pt x="6954429" y="1775442"/>
+                  </a:lnTo>
+                  <a:lnTo>
+                    <a:pt x="6877961" y="1772585"/>
+                  </a:lnTo>
+                  <a:lnTo>
+                    <a:pt x="6801492" y="1769554"/>
+                  </a:lnTo>
+                  <a:lnTo>
+                    <a:pt x="6725024" y="1766337"/>
+                  </a:lnTo>
+                  <a:lnTo>
+                    <a:pt x="6648556" y="1762922"/>
+                  </a:lnTo>
+                  <a:lnTo>
+                    <a:pt x="6572087" y="1759298"/>
+                  </a:lnTo>
+                  <a:lnTo>
+                    <a:pt x="6495619" y="1755452"/>
+                  </a:lnTo>
+                  <a:lnTo>
+                    <a:pt x="6419150" y="1751370"/>
+                  </a:lnTo>
+                  <a:lnTo>
+                    <a:pt x="6342682" y="1747037"/>
+                  </a:lnTo>
+                  <a:lnTo>
+                    <a:pt x="6266213" y="1742439"/>
+                  </a:lnTo>
+                  <a:lnTo>
+                    <a:pt x="6189745" y="1737558"/>
+                  </a:lnTo>
+                  <a:lnTo>
+                    <a:pt x="6113277" y="1732379"/>
+                  </a:lnTo>
+                  <a:lnTo>
+                    <a:pt x="6036808" y="1726882"/>
+                  </a:lnTo>
+                  <a:lnTo>
+                    <a:pt x="5960340" y="1721047"/>
+                  </a:lnTo>
+                  <a:lnTo>
+                    <a:pt x="5883871" y="1714855"/>
+                  </a:lnTo>
+                  <a:lnTo>
+                    <a:pt x="5807403" y="1708283"/>
+                  </a:lnTo>
+                  <a:lnTo>
+                    <a:pt x="5730934" y="1701308"/>
+                  </a:lnTo>
+                  <a:lnTo>
+                    <a:pt x="5654466" y="1693905"/>
+                  </a:lnTo>
+                  <a:lnTo>
+                    <a:pt x="5577998" y="1686049"/>
+                  </a:lnTo>
+                  <a:lnTo>
+                    <a:pt x="5501529" y="1677710"/>
+                  </a:lnTo>
+                  <a:lnTo>
+                    <a:pt x="5425061" y="1668860"/>
+                  </a:lnTo>
+                  <a:lnTo>
+                    <a:pt x="5348592" y="1659467"/>
+                  </a:lnTo>
+                  <a:lnTo>
+                    <a:pt x="5272124" y="1649498"/>
+                  </a:lnTo>
+                  <a:lnTo>
+                    <a:pt x="5195655" y="1638918"/>
+                  </a:lnTo>
+                  <a:lnTo>
+                    <a:pt x="5119187" y="1627689"/>
+                  </a:lnTo>
+                  <a:lnTo>
+                    <a:pt x="5042719" y="1615771"/>
+                  </a:lnTo>
+                  <a:lnTo>
+                    <a:pt x="4966250" y="1603122"/>
+                  </a:lnTo>
+                  <a:lnTo>
+                    <a:pt x="4889782" y="1589698"/>
+                  </a:lnTo>
+                  <a:lnTo>
+                    <a:pt x="4813313" y="1575450"/>
+                  </a:lnTo>
+                  <a:lnTo>
+                    <a:pt x="4736845" y="1560329"/>
+                  </a:lnTo>
+                  <a:lnTo>
+                    <a:pt x="4660376" y="1544280"/>
+                  </a:lnTo>
+                  <a:lnTo>
+                    <a:pt x="4583908" y="1527246"/>
+                  </a:lnTo>
+                  <a:lnTo>
+                    <a:pt x="4507439" y="1509169"/>
+                  </a:lnTo>
+                  <a:lnTo>
+                    <a:pt x="4430971" y="1489982"/>
+                  </a:lnTo>
+                  <a:lnTo>
+                    <a:pt x="4354503" y="1469619"/>
+                  </a:lnTo>
+                  <a:lnTo>
+                    <a:pt x="4278034" y="1448007"/>
+                  </a:lnTo>
+                  <a:lnTo>
+                    <a:pt x="4201566" y="1425069"/>
+                  </a:lnTo>
+                  <a:lnTo>
+                    <a:pt x="4125097" y="1400725"/>
+                  </a:lnTo>
+                  <a:lnTo>
+                    <a:pt x="4048629" y="1374887"/>
+                  </a:lnTo>
+                  <a:lnTo>
+                    <a:pt x="3972160" y="1347466"/>
+                  </a:lnTo>
+                  <a:lnTo>
+                    <a:pt x="3895692" y="1318362"/>
+                  </a:lnTo>
+                  <a:lnTo>
+                    <a:pt x="3819224" y="1287473"/>
+                  </a:lnTo>
+                  <a:lnTo>
+                    <a:pt x="3742755" y="1254690"/>
+                  </a:lnTo>
+                  <a:lnTo>
+                    <a:pt x="3666287" y="1219897"/>
+                  </a:lnTo>
+                  <a:lnTo>
+                    <a:pt x="3589818" y="1182969"/>
+                  </a:lnTo>
+                  <a:lnTo>
+                    <a:pt x="3513350" y="1143777"/>
+                  </a:lnTo>
+                  <a:lnTo>
+                    <a:pt x="3436881" y="1102182"/>
+                  </a:lnTo>
+                  <a:lnTo>
+                    <a:pt x="3360413" y="1058035"/>
+                  </a:lnTo>
+                  <a:lnTo>
+                    <a:pt x="3283945" y="1032701"/>
+                  </a:lnTo>
+                  <a:lnTo>
+                    <a:pt x="3207476" y="1017176"/>
+                  </a:lnTo>
+                  <a:lnTo>
+                    <a:pt x="3131008" y="1001345"/>
+                  </a:lnTo>
+                  <a:lnTo>
+                    <a:pt x="3054539" y="985202"/>
+                  </a:lnTo>
+                  <a:lnTo>
+                    <a:pt x="2978071" y="968742"/>
+                  </a:lnTo>
+                  <a:lnTo>
+                    <a:pt x="2901602" y="951958"/>
+                  </a:lnTo>
+                  <a:lnTo>
+                    <a:pt x="2825134" y="934844"/>
+                  </a:lnTo>
+                  <a:lnTo>
+                    <a:pt x="2748666" y="917394"/>
+                  </a:lnTo>
+                  <a:lnTo>
+                    <a:pt x="2672197" y="899600"/>
+                  </a:lnTo>
+                  <a:lnTo>
+                    <a:pt x="2595729" y="881456"/>
+                  </a:lnTo>
+                  <a:lnTo>
+                    <a:pt x="2519260" y="862956"/>
+                  </a:lnTo>
+                  <a:lnTo>
+                    <a:pt x="2442792" y="844091"/>
+                  </a:lnTo>
+                  <a:lnTo>
+                    <a:pt x="2366323" y="824855"/>
+                  </a:lnTo>
+                  <a:lnTo>
+                    <a:pt x="2289855" y="805241"/>
+                  </a:lnTo>
+                  <a:lnTo>
+                    <a:pt x="2213386" y="785241"/>
+                  </a:lnTo>
+                  <a:lnTo>
+                    <a:pt x="2136918" y="764848"/>
+                  </a:lnTo>
+                  <a:lnTo>
+                    <a:pt x="2060450" y="744054"/>
+                  </a:lnTo>
+                  <a:lnTo>
+                    <a:pt x="1983981" y="722850"/>
+                  </a:lnTo>
+                  <a:lnTo>
+                    <a:pt x="1907513" y="701230"/>
+                  </a:lnTo>
+                  <a:lnTo>
+                    <a:pt x="1831044" y="679184"/>
+                  </a:lnTo>
+                  <a:lnTo>
+                    <a:pt x="1754576" y="656705"/>
+                  </a:lnTo>
+                  <a:lnTo>
+                    <a:pt x="1678107" y="633783"/>
+                  </a:lnTo>
+                  <a:lnTo>
+                    <a:pt x="1601639" y="610411"/>
+                  </a:lnTo>
+                  <a:lnTo>
+                    <a:pt x="1525171" y="586579"/>
+                  </a:lnTo>
+                  <a:lnTo>
+                    <a:pt x="1448702" y="562278"/>
+                  </a:lnTo>
+                  <a:lnTo>
+                    <a:pt x="1372234" y="537499"/>
+                  </a:lnTo>
+                  <a:lnTo>
+                    <a:pt x="1295765" y="512233"/>
+                  </a:lnTo>
+                  <a:lnTo>
+                    <a:pt x="1219297" y="486470"/>
+                  </a:lnTo>
+                  <a:lnTo>
+                    <a:pt x="1142828" y="460200"/>
+                  </a:lnTo>
+                  <a:lnTo>
+                    <a:pt x="1066360" y="433413"/>
+                  </a:lnTo>
+                  <a:lnTo>
+                    <a:pt x="989892" y="406099"/>
+                  </a:lnTo>
+                  <a:lnTo>
+                    <a:pt x="913423" y="378248"/>
+                  </a:lnTo>
+                  <a:lnTo>
+                    <a:pt x="836955" y="349850"/>
+                  </a:lnTo>
+                  <a:lnTo>
+                    <a:pt x="760486" y="320892"/>
+                  </a:lnTo>
+                  <a:lnTo>
+                    <a:pt x="684018" y="291365"/>
+                  </a:lnTo>
+                  <a:lnTo>
+                    <a:pt x="607549" y="261258"/>
+                  </a:lnTo>
+                  <a:lnTo>
+                    <a:pt x="531081" y="230558"/>
+                  </a:lnTo>
+                  <a:lnTo>
+                    <a:pt x="454613" y="199254"/>
+                  </a:lnTo>
+                  <a:lnTo>
+                    <a:pt x="378144" y="167334"/>
+                  </a:lnTo>
+                  <a:lnTo>
+                    <a:pt x="301676" y="134787"/>
+                  </a:lnTo>
+                  <a:lnTo>
+                    <a:pt x="225207" y="101599"/>
+                  </a:lnTo>
+                  <a:lnTo>
+                    <a:pt x="148739" y="67759"/>
+                  </a:lnTo>
+                  <a:lnTo>
+                    <a:pt x="72270" y="33253"/>
                   </a:lnTo>
                   <a:lnTo>
                     <a:pt x="0" y="0"/>
@@ -4115,285 +4502,285 @@
         </p:sp>
         <p:sp>
           <p:nvSpPr>
-            <p:cNvPr id="24" name="pl24"/>
+            <p:cNvPr id="33" name="pl33"/>
             <p:cNvSpPr/>
             <p:nvPr/>
           </p:nvSpPr>
           <p:spPr>
             <a:xfrm>
-              <a:off x="1473144" y="2209169"/>
-              <a:ext cx="6702804" cy="3110764"/>
+              <a:off x="1473144" y="2185486"/>
+              <a:ext cx="6702804" cy="3169440"/>
             </a:xfrm>
             <a:custGeom>
               <a:avLst/>
               <a:pathLst>
-                <a:path w="6702804" h="3110764">
+                <a:path w="6702804" h="3169440">
                   <a:moveTo>
                     <a:pt x="0" y="0"/>
                   </a:moveTo>
                   <a:lnTo>
-                    <a:pt x="50050" y="82514"/>
-                  </a:lnTo>
-                  <a:lnTo>
-                    <a:pt x="126518" y="203699"/>
-                  </a:lnTo>
-                  <a:lnTo>
-                    <a:pt x="202987" y="320191"/>
-                  </a:lnTo>
-                  <a:lnTo>
-                    <a:pt x="279455" y="432170"/>
-                  </a:lnTo>
-                  <a:lnTo>
-                    <a:pt x="355924" y="539813"/>
-                  </a:lnTo>
-                  <a:lnTo>
-                    <a:pt x="432392" y="643287"/>
-                  </a:lnTo>
-                  <a:lnTo>
-                    <a:pt x="508861" y="742753"/>
-                  </a:lnTo>
-                  <a:lnTo>
-                    <a:pt x="585329" y="838366"/>
-                  </a:lnTo>
-                  <a:lnTo>
-                    <a:pt x="661798" y="930277"/>
-                  </a:lnTo>
-                  <a:lnTo>
-                    <a:pt x="738266" y="1018627"/>
-                  </a:lnTo>
-                  <a:lnTo>
-                    <a:pt x="814734" y="1103556"/>
-                  </a:lnTo>
-                  <a:lnTo>
-                    <a:pt x="891203" y="1185196"/>
-                  </a:lnTo>
-                  <a:lnTo>
-                    <a:pt x="967671" y="1263673"/>
-                  </a:lnTo>
-                  <a:lnTo>
-                    <a:pt x="1044140" y="1339111"/>
-                  </a:lnTo>
-                  <a:lnTo>
-                    <a:pt x="1120608" y="1411628"/>
-                  </a:lnTo>
-                  <a:lnTo>
-                    <a:pt x="1197077" y="1481335"/>
-                  </a:lnTo>
-                  <a:lnTo>
-                    <a:pt x="1273545" y="1548343"/>
-                  </a:lnTo>
-                  <a:lnTo>
-                    <a:pt x="1350013" y="1612756"/>
-                  </a:lnTo>
-                  <a:lnTo>
-                    <a:pt x="1426482" y="1674674"/>
-                  </a:lnTo>
-                  <a:lnTo>
-                    <a:pt x="1502950" y="1734194"/>
-                  </a:lnTo>
-                  <a:lnTo>
-                    <a:pt x="1579419" y="1791408"/>
-                  </a:lnTo>
-                  <a:lnTo>
-                    <a:pt x="1655887" y="1846407"/>
-                  </a:lnTo>
-                  <a:lnTo>
-                    <a:pt x="1732356" y="1899275"/>
-                  </a:lnTo>
-                  <a:lnTo>
-                    <a:pt x="1808824" y="1950096"/>
-                  </a:lnTo>
-                  <a:lnTo>
-                    <a:pt x="1885292" y="1998949"/>
-                  </a:lnTo>
-                  <a:lnTo>
-                    <a:pt x="1961761" y="2045909"/>
-                  </a:lnTo>
-                  <a:lnTo>
-                    <a:pt x="2038229" y="2091051"/>
-                  </a:lnTo>
-                  <a:lnTo>
-                    <a:pt x="2114698" y="2134444"/>
-                  </a:lnTo>
-                  <a:lnTo>
-                    <a:pt x="2191166" y="2176157"/>
-                  </a:lnTo>
-                  <a:lnTo>
-                    <a:pt x="2267635" y="2216254"/>
-                  </a:lnTo>
-                  <a:lnTo>
-                    <a:pt x="2344103" y="2254798"/>
-                  </a:lnTo>
-                  <a:lnTo>
-                    <a:pt x="2420571" y="2291849"/>
-                  </a:lnTo>
-                  <a:lnTo>
-                    <a:pt x="2497040" y="2327465"/>
-                  </a:lnTo>
-                  <a:lnTo>
-                    <a:pt x="2573508" y="2361702"/>
-                  </a:lnTo>
-                  <a:lnTo>
-                    <a:pt x="2649977" y="2394613"/>
-                  </a:lnTo>
-                  <a:lnTo>
-                    <a:pt x="2726445" y="2426249"/>
-                  </a:lnTo>
-                  <a:lnTo>
-                    <a:pt x="2802914" y="2456660"/>
-                  </a:lnTo>
-                  <a:lnTo>
-                    <a:pt x="2879382" y="2485893"/>
-                  </a:lnTo>
-                  <a:lnTo>
-                    <a:pt x="2955851" y="2513994"/>
-                  </a:lnTo>
-                  <a:lnTo>
-                    <a:pt x="3032319" y="2541006"/>
-                  </a:lnTo>
-                  <a:lnTo>
-                    <a:pt x="3108787" y="2566973"/>
-                  </a:lnTo>
-                  <a:lnTo>
-                    <a:pt x="3185256" y="2591933"/>
-                  </a:lnTo>
-                  <a:lnTo>
-                    <a:pt x="3261724" y="2615927"/>
-                  </a:lnTo>
-                  <a:lnTo>
-                    <a:pt x="3338193" y="2638991"/>
-                  </a:lnTo>
-                  <a:lnTo>
-                    <a:pt x="3414661" y="2661163"/>
-                  </a:lnTo>
-                  <a:lnTo>
-                    <a:pt x="3491130" y="2682475"/>
-                  </a:lnTo>
-                  <a:lnTo>
-                    <a:pt x="3567598" y="2702962"/>
-                  </a:lnTo>
-                  <a:lnTo>
-                    <a:pt x="3644066" y="2722656"/>
-                  </a:lnTo>
-                  <a:lnTo>
-                    <a:pt x="3720535" y="2741587"/>
-                  </a:lnTo>
-                  <a:lnTo>
-                    <a:pt x="3797003" y="2759784"/>
-                  </a:lnTo>
-                  <a:lnTo>
-                    <a:pt x="3873472" y="2777277"/>
-                  </a:lnTo>
-                  <a:lnTo>
-                    <a:pt x="3949940" y="2794093"/>
-                  </a:lnTo>
-                  <a:lnTo>
-                    <a:pt x="4026409" y="2810257"/>
-                  </a:lnTo>
-                  <a:lnTo>
-                    <a:pt x="4102877" y="2825795"/>
-                  </a:lnTo>
-                  <a:lnTo>
-                    <a:pt x="4179345" y="2840731"/>
-                  </a:lnTo>
-                  <a:lnTo>
-                    <a:pt x="4255814" y="2855089"/>
-                  </a:lnTo>
-                  <a:lnTo>
-                    <a:pt x="4332282" y="2868890"/>
-                  </a:lnTo>
-                  <a:lnTo>
-                    <a:pt x="4408751" y="2882157"/>
-                  </a:lnTo>
-                  <a:lnTo>
-                    <a:pt x="4485219" y="2894911"/>
-                  </a:lnTo>
-                  <a:lnTo>
-                    <a:pt x="4561688" y="2907170"/>
-                  </a:lnTo>
-                  <a:lnTo>
-                    <a:pt x="4638156" y="2918955"/>
-                  </a:lnTo>
-                  <a:lnTo>
-                    <a:pt x="4714624" y="2930283"/>
-                  </a:lnTo>
-                  <a:lnTo>
-                    <a:pt x="4791093" y="2941172"/>
-                  </a:lnTo>
-                  <a:lnTo>
-                    <a:pt x="4867561" y="2951640"/>
-                  </a:lnTo>
-                  <a:lnTo>
-                    <a:pt x="4944030" y="2961702"/>
-                  </a:lnTo>
-                  <a:lnTo>
-                    <a:pt x="5020498" y="2971374"/>
-                  </a:lnTo>
-                  <a:lnTo>
-                    <a:pt x="5096967" y="2980672"/>
-                  </a:lnTo>
-                  <a:lnTo>
-                    <a:pt x="5173435" y="2989610"/>
-                  </a:lnTo>
-                  <a:lnTo>
-                    <a:pt x="5249904" y="2998201"/>
-                  </a:lnTo>
-                  <a:lnTo>
-                    <a:pt x="5326372" y="3006460"/>
-                  </a:lnTo>
-                  <a:lnTo>
-                    <a:pt x="5402840" y="3014399"/>
-                  </a:lnTo>
-                  <a:lnTo>
-                    <a:pt x="5479309" y="3022031"/>
-                  </a:lnTo>
-                  <a:lnTo>
-                    <a:pt x="5555777" y="3029367"/>
-                  </a:lnTo>
-                  <a:lnTo>
-                    <a:pt x="5632246" y="3036418"/>
-                  </a:lnTo>
-                  <a:lnTo>
-                    <a:pt x="5708714" y="3043197"/>
-                  </a:lnTo>
-                  <a:lnTo>
-                    <a:pt x="5785183" y="3049713"/>
-                  </a:lnTo>
-                  <a:lnTo>
-                    <a:pt x="5861651" y="3055977"/>
-                  </a:lnTo>
-                  <a:lnTo>
-                    <a:pt x="5938119" y="3061998"/>
-                  </a:lnTo>
-                  <a:lnTo>
-                    <a:pt x="6014588" y="3067786"/>
-                  </a:lnTo>
-                  <a:lnTo>
-                    <a:pt x="6091056" y="3073350"/>
-                  </a:lnTo>
-                  <a:lnTo>
-                    <a:pt x="6167525" y="3078698"/>
-                  </a:lnTo>
-                  <a:lnTo>
-                    <a:pt x="6243993" y="3083839"/>
-                  </a:lnTo>
-                  <a:lnTo>
-                    <a:pt x="6320462" y="3088781"/>
-                  </a:lnTo>
-                  <a:lnTo>
-                    <a:pt x="6396930" y="3093532"/>
-                  </a:lnTo>
-                  <a:lnTo>
-                    <a:pt x="6473398" y="3098098"/>
-                  </a:lnTo>
-                  <a:lnTo>
-                    <a:pt x="6549867" y="3102488"/>
-                  </a:lnTo>
-                  <a:lnTo>
-                    <a:pt x="6626335" y="3106708"/>
-                  </a:lnTo>
-                  <a:lnTo>
-                    <a:pt x="6702804" y="3110764"/>
+                    <a:pt x="50050" y="84070"/>
+                  </a:lnTo>
+                  <a:lnTo>
+                    <a:pt x="126518" y="207541"/>
+                  </a:lnTo>
+                  <a:lnTo>
+                    <a:pt x="202987" y="326230"/>
+                  </a:lnTo>
+                  <a:lnTo>
+                    <a:pt x="279455" y="440322"/>
+                  </a:lnTo>
+                  <a:lnTo>
+                    <a:pt x="355924" y="549995"/>
+                  </a:lnTo>
+                  <a:lnTo>
+                    <a:pt x="432392" y="655420"/>
+                  </a:lnTo>
+                  <a:lnTo>
+                    <a:pt x="508861" y="756763"/>
+                  </a:lnTo>
+                  <a:lnTo>
+                    <a:pt x="585329" y="854180"/>
+                  </a:lnTo>
+                  <a:lnTo>
+                    <a:pt x="661798" y="947824"/>
+                  </a:lnTo>
+                  <a:lnTo>
+                    <a:pt x="738266" y="1037841"/>
+                  </a:lnTo>
+                  <a:lnTo>
+                    <a:pt x="814734" y="1124372"/>
+                  </a:lnTo>
+                  <a:lnTo>
+                    <a:pt x="891203" y="1207551"/>
+                  </a:lnTo>
+                  <a:lnTo>
+                    <a:pt x="967671" y="1287509"/>
+                  </a:lnTo>
+                  <a:lnTo>
+                    <a:pt x="1044140" y="1364370"/>
+                  </a:lnTo>
+                  <a:lnTo>
+                    <a:pt x="1120608" y="1438254"/>
+                  </a:lnTo>
+                  <a:lnTo>
+                    <a:pt x="1197077" y="1509277"/>
+                  </a:lnTo>
+                  <a:lnTo>
+                    <a:pt x="1273545" y="1577549"/>
+                  </a:lnTo>
+                  <a:lnTo>
+                    <a:pt x="1350013" y="1643176"/>
+                  </a:lnTo>
+                  <a:lnTo>
+                    <a:pt x="1426482" y="1706262"/>
+                  </a:lnTo>
+                  <a:lnTo>
+                    <a:pt x="1502950" y="1766904"/>
+                  </a:lnTo>
+                  <a:lnTo>
+                    <a:pt x="1579419" y="1825198"/>
+                  </a:lnTo>
+                  <a:lnTo>
+                    <a:pt x="1655887" y="1881234"/>
+                  </a:lnTo>
+                  <a:lnTo>
+                    <a:pt x="1732356" y="1935100"/>
+                  </a:lnTo>
+                  <a:lnTo>
+                    <a:pt x="1808824" y="1986879"/>
+                  </a:lnTo>
+                  <a:lnTo>
+                    <a:pt x="1885292" y="2036653"/>
+                  </a:lnTo>
+                  <a:lnTo>
+                    <a:pt x="1961761" y="2084500"/>
+                  </a:lnTo>
+                  <a:lnTo>
+                    <a:pt x="2038229" y="2130493"/>
+                  </a:lnTo>
+                  <a:lnTo>
+                    <a:pt x="2114698" y="2174704"/>
+                  </a:lnTo>
+                  <a:lnTo>
+                    <a:pt x="2191166" y="2217204"/>
+                  </a:lnTo>
+                  <a:lnTo>
+                    <a:pt x="2267635" y="2258057"/>
+                  </a:lnTo>
+                  <a:lnTo>
+                    <a:pt x="2344103" y="2297328"/>
+                  </a:lnTo>
+                  <a:lnTo>
+                    <a:pt x="2420571" y="2335079"/>
+                  </a:lnTo>
+                  <a:lnTo>
+                    <a:pt x="2497040" y="2371367"/>
+                  </a:lnTo>
+                  <a:lnTo>
+                    <a:pt x="2573508" y="2406249"/>
+                  </a:lnTo>
+                  <a:lnTo>
+                    <a:pt x="2649977" y="2439781"/>
+                  </a:lnTo>
+                  <a:lnTo>
+                    <a:pt x="2726445" y="2472014"/>
+                  </a:lnTo>
+                  <a:lnTo>
+                    <a:pt x="2802914" y="2502998"/>
+                  </a:lnTo>
+                  <a:lnTo>
+                    <a:pt x="2879382" y="2532783"/>
+                  </a:lnTo>
+                  <a:lnTo>
+                    <a:pt x="2955851" y="2561413"/>
+                  </a:lnTo>
+                  <a:lnTo>
+                    <a:pt x="3032319" y="2588935"/>
+                  </a:lnTo>
+                  <a:lnTo>
+                    <a:pt x="3108787" y="2615391"/>
+                  </a:lnTo>
+                  <a:lnTo>
+                    <a:pt x="3185256" y="2640823"/>
+                  </a:lnTo>
+                  <a:lnTo>
+                    <a:pt x="3261724" y="2665269"/>
+                  </a:lnTo>
+                  <a:lnTo>
+                    <a:pt x="3338193" y="2688769"/>
+                  </a:lnTo>
+                  <a:lnTo>
+                    <a:pt x="3414661" y="2711358"/>
+                  </a:lnTo>
+                  <a:lnTo>
+                    <a:pt x="3491130" y="2733073"/>
+                  </a:lnTo>
+                  <a:lnTo>
+                    <a:pt x="3567598" y="2753946"/>
+                  </a:lnTo>
+                  <a:lnTo>
+                    <a:pt x="3644066" y="2774011"/>
+                  </a:lnTo>
+                  <a:lnTo>
+                    <a:pt x="3720535" y="2793299"/>
+                  </a:lnTo>
+                  <a:lnTo>
+                    <a:pt x="3797003" y="2811840"/>
+                  </a:lnTo>
+                  <a:lnTo>
+                    <a:pt x="3873472" y="2829663"/>
+                  </a:lnTo>
+                  <a:lnTo>
+                    <a:pt x="3949940" y="2846795"/>
+                  </a:lnTo>
+                  <a:lnTo>
+                    <a:pt x="4026409" y="2863264"/>
+                  </a:lnTo>
+                  <a:lnTo>
+                    <a:pt x="4102877" y="2879095"/>
+                  </a:lnTo>
+                  <a:lnTo>
+                    <a:pt x="4179345" y="2894313"/>
+                  </a:lnTo>
+                  <a:lnTo>
+                    <a:pt x="4255814" y="2908942"/>
+                  </a:lnTo>
+                  <a:lnTo>
+                    <a:pt x="4332282" y="2923004"/>
+                  </a:lnTo>
+                  <a:lnTo>
+                    <a:pt x="4408751" y="2936521"/>
+                  </a:lnTo>
+                  <a:lnTo>
+                    <a:pt x="4485219" y="2949515"/>
+                  </a:lnTo>
+                  <a:lnTo>
+                    <a:pt x="4561688" y="2962006"/>
+                  </a:lnTo>
+                  <a:lnTo>
+                    <a:pt x="4638156" y="2974012"/>
+                  </a:lnTo>
+                  <a:lnTo>
+                    <a:pt x="4714624" y="2985554"/>
+                  </a:lnTo>
+                  <a:lnTo>
+                    <a:pt x="4791093" y="2996649"/>
+                  </a:lnTo>
+                  <a:lnTo>
+                    <a:pt x="4867561" y="3007314"/>
+                  </a:lnTo>
+                  <a:lnTo>
+                    <a:pt x="4944030" y="3017566"/>
+                  </a:lnTo>
+                  <a:lnTo>
+                    <a:pt x="5020498" y="3027421"/>
+                  </a:lnTo>
+                  <a:lnTo>
+                    <a:pt x="5096967" y="3036894"/>
+                  </a:lnTo>
+                  <a:lnTo>
+                    <a:pt x="5173435" y="3046001"/>
+                  </a:lnTo>
+                  <a:lnTo>
+                    <a:pt x="5249904" y="3054754"/>
+                  </a:lnTo>
+                  <a:lnTo>
+                    <a:pt x="5326372" y="3063169"/>
+                  </a:lnTo>
+                  <a:lnTo>
+                    <a:pt x="5402840" y="3071257"/>
+                  </a:lnTo>
+                  <a:lnTo>
+                    <a:pt x="5479309" y="3079033"/>
+                  </a:lnTo>
+                  <a:lnTo>
+                    <a:pt x="5555777" y="3086507"/>
+                  </a:lnTo>
+                  <a:lnTo>
+                    <a:pt x="5632246" y="3093692"/>
+                  </a:lnTo>
+                  <a:lnTo>
+                    <a:pt x="5708714" y="3100598"/>
+                  </a:lnTo>
+                  <a:lnTo>
+                    <a:pt x="5785183" y="3107237"/>
+                  </a:lnTo>
+                  <a:lnTo>
+                    <a:pt x="5861651" y="3113619"/>
+                  </a:lnTo>
+                  <a:lnTo>
+                    <a:pt x="5938119" y="3119754"/>
+                  </a:lnTo>
+                  <a:lnTo>
+                    <a:pt x="6014588" y="3125651"/>
+                  </a:lnTo>
+                  <a:lnTo>
+                    <a:pt x="6091056" y="3131320"/>
+                  </a:lnTo>
+                  <a:lnTo>
+                    <a:pt x="6167525" y="3136769"/>
+                  </a:lnTo>
+                  <a:lnTo>
+                    <a:pt x="6243993" y="3142007"/>
+                  </a:lnTo>
+                  <a:lnTo>
+                    <a:pt x="6320462" y="3147042"/>
+                  </a:lnTo>
+                  <a:lnTo>
+                    <a:pt x="6396930" y="3151883"/>
+                  </a:lnTo>
+                  <a:lnTo>
+                    <a:pt x="6473398" y="3156535"/>
+                  </a:lnTo>
+                  <a:lnTo>
+                    <a:pt x="6549867" y="3161008"/>
+                  </a:lnTo>
+                  <a:lnTo>
+                    <a:pt x="6626335" y="3165307"/>
+                  </a:lnTo>
+                  <a:lnTo>
+                    <a:pt x="6702804" y="3169440"/>
                   </a:lnTo>
                 </a:path>
               </a:pathLst>
@@ -4416,13 +4803,13 @@
         </p:sp>
         <p:sp>
           <p:nvSpPr>
-            <p:cNvPr id="25" name="pl25"/>
+            <p:cNvPr id="34" name="pl34"/>
             <p:cNvSpPr/>
             <p:nvPr/>
           </p:nvSpPr>
           <p:spPr>
             <a:xfrm>
-              <a:off x="915645" y="4655980"/>
+              <a:off x="915645" y="4678449"/>
               <a:ext cx="7682587" cy="0"/>
             </a:xfrm>
             <a:custGeom>
@@ -4459,21 +4846,21 @@
         </p:sp>
         <p:sp>
           <p:nvSpPr>
-            <p:cNvPr id="26" name="pl26"/>
+            <p:cNvPr id="35" name="pl35"/>
             <p:cNvSpPr/>
             <p:nvPr/>
           </p:nvSpPr>
           <p:spPr>
             <a:xfrm>
-              <a:off x="4250960" y="2209169"/>
-              <a:ext cx="0" cy="3364365"/>
+              <a:off x="4250960" y="2185486"/>
+              <a:ext cx="0" cy="3427824"/>
             </a:xfrm>
             <a:custGeom>
               <a:avLst/>
               <a:pathLst>
-                <a:path w="0" h="3364365">
+                <a:path w="0" h="3427824">
                   <a:moveTo>
-                    <a:pt x="0" y="3364365"/>
+                    <a:pt x="0" y="3427824"/>
                   </a:moveTo>
                   <a:lnTo>
                     <a:pt x="0" y="0"/>
@@ -4502,13 +4889,13 @@
         </p:sp>
         <p:sp>
           <p:nvSpPr>
-            <p:cNvPr id="27" name="tx27"/>
+            <p:cNvPr id="36" name="tx36"/>
             <p:cNvSpPr/>
             <p:nvPr/>
           </p:nvSpPr>
           <p:spPr>
             <a:xfrm>
-              <a:off x="756929" y="5369631"/>
+              <a:off x="756929" y="5406523"/>
               <a:ext cx="79004" cy="101955"/>
             </a:xfrm>
             <a:prstGeom prst="rect">
@@ -4548,13 +4935,13 @@
         </p:sp>
         <p:sp>
           <p:nvSpPr>
-            <p:cNvPr id="28" name="tx28"/>
+            <p:cNvPr id="37" name="tx37"/>
             <p:cNvSpPr/>
             <p:nvPr/>
           </p:nvSpPr>
           <p:spPr>
             <a:xfrm>
-              <a:off x="756929" y="4605002"/>
+              <a:off x="756929" y="4627472"/>
               <a:ext cx="79004" cy="101955"/>
             </a:xfrm>
             <a:prstGeom prst="rect">
@@ -4594,13 +4981,13 @@
         </p:sp>
         <p:sp>
           <p:nvSpPr>
-            <p:cNvPr id="29" name="tx29"/>
+            <p:cNvPr id="38" name="tx38"/>
             <p:cNvSpPr/>
             <p:nvPr/>
           </p:nvSpPr>
           <p:spPr>
             <a:xfrm>
-              <a:off x="756929" y="3840374"/>
+              <a:off x="756929" y="3848420"/>
               <a:ext cx="79004" cy="101955"/>
             </a:xfrm>
             <a:prstGeom prst="rect">
@@ -4640,13 +5027,13 @@
         </p:sp>
         <p:sp>
           <p:nvSpPr>
-            <p:cNvPr id="30" name="tx30"/>
+            <p:cNvPr id="39" name="tx39"/>
             <p:cNvSpPr/>
             <p:nvPr/>
           </p:nvSpPr>
           <p:spPr>
             <a:xfrm>
-              <a:off x="756929" y="3075745"/>
+              <a:off x="756929" y="3069369"/>
               <a:ext cx="79004" cy="101955"/>
             </a:xfrm>
             <a:prstGeom prst="rect">
@@ -4686,13 +5073,13 @@
         </p:sp>
         <p:sp>
           <p:nvSpPr>
-            <p:cNvPr id="31" name="tx31"/>
+            <p:cNvPr id="40" name="tx40"/>
             <p:cNvSpPr/>
             <p:nvPr/>
           </p:nvSpPr>
           <p:spPr>
             <a:xfrm>
-              <a:off x="756929" y="2311117"/>
+              <a:off x="756929" y="2290318"/>
               <a:ext cx="79004" cy="101955"/>
             </a:xfrm>
             <a:prstGeom prst="rect">
@@ -4732,14 +5119,14 @@
         </p:sp>
         <p:sp>
           <p:nvSpPr>
-            <p:cNvPr id="32" name="tx32"/>
+            <p:cNvPr id="41" name="tx41"/>
             <p:cNvSpPr/>
             <p:nvPr/>
           </p:nvSpPr>
           <p:spPr>
             <a:xfrm>
-              <a:off x="2451993" y="5653245"/>
-              <a:ext cx="244784" cy="101955"/>
+              <a:off x="1598722" y="5693022"/>
+              <a:ext cx="205282" cy="101955"/>
             </a:xfrm>
             <a:prstGeom prst="rect">
               <a:avLst/>
@@ -4771,21 +5158,21 @@
                   <a:latin typeface="Helvetica"/>
                   <a:cs typeface="Helvetica"/>
                 </a:rPr>
-                <a:t>-0.2</a:t>
+                <a:t>-30</a:t>
               </a:r>
             </a:p>
           </p:txBody>
         </p:sp>
         <p:sp>
           <p:nvSpPr>
-            <p:cNvPr id="33" name="tx33"/>
+            <p:cNvPr id="42" name="tx42"/>
             <p:cNvSpPr/>
             <p:nvPr/>
           </p:nvSpPr>
           <p:spPr>
             <a:xfrm>
-              <a:off x="4221672" y="5653245"/>
-              <a:ext cx="197510" cy="101955"/>
+              <a:off x="2471744" y="5693022"/>
+              <a:ext cx="205282" cy="101955"/>
             </a:xfrm>
             <a:prstGeom prst="rect">
               <a:avLst/>
@@ -4817,21 +5204,21 @@
                   <a:latin typeface="Helvetica"/>
                   <a:cs typeface="Helvetica"/>
                 </a:rPr>
-                <a:t>0.0</a:t>
+                <a:t>-20</a:t>
               </a:r>
             </a:p>
           </p:txBody>
         </p:sp>
         <p:sp>
           <p:nvSpPr>
-            <p:cNvPr id="34" name="tx34"/>
+            <p:cNvPr id="43" name="tx43"/>
             <p:cNvSpPr/>
             <p:nvPr/>
           </p:nvSpPr>
           <p:spPr>
             <a:xfrm>
-              <a:off x="5967715" y="5653245"/>
-              <a:ext cx="197510" cy="101955"/>
+              <a:off x="3344765" y="5693022"/>
+              <a:ext cx="205282" cy="101955"/>
             </a:xfrm>
             <a:prstGeom prst="rect">
               <a:avLst/>
@@ -4863,21 +5250,21 @@
                   <a:latin typeface="Helvetica"/>
                   <a:cs typeface="Helvetica"/>
                 </a:rPr>
-                <a:t>0.2</a:t>
+                <a:t>-10</a:t>
               </a:r>
             </a:p>
           </p:txBody>
         </p:sp>
         <p:sp>
           <p:nvSpPr>
-            <p:cNvPr id="35" name="tx35"/>
+            <p:cNvPr id="44" name="tx44"/>
             <p:cNvSpPr/>
             <p:nvPr/>
           </p:nvSpPr>
           <p:spPr>
             <a:xfrm>
-              <a:off x="7713757" y="5653245"/>
-              <a:ext cx="197510" cy="101955"/>
+              <a:off x="4280925" y="5693022"/>
+              <a:ext cx="79004" cy="101955"/>
             </a:xfrm>
             <a:prstGeom prst="rect">
               <a:avLst/>
@@ -4909,21 +5296,205 @@
                   <a:latin typeface="Helvetica"/>
                   <a:cs typeface="Helvetica"/>
                 </a:rPr>
-                <a:t>0.4</a:t>
+                <a:t>0</a:t>
               </a:r>
             </a:p>
           </p:txBody>
         </p:sp>
         <p:sp>
           <p:nvSpPr>
-            <p:cNvPr id="36" name="tx36"/>
+            <p:cNvPr id="45" name="tx45"/>
             <p:cNvSpPr/>
             <p:nvPr/>
           </p:nvSpPr>
           <p:spPr>
             <a:xfrm>
-              <a:off x="2688337" y="5834415"/>
-              <a:ext cx="2138873" cy="127558"/>
+              <a:off x="5114445" y="5693022"/>
+              <a:ext cx="158008" cy="101955"/>
+            </a:xfrm>
+            <a:prstGeom prst="rect">
+              <a:avLst/>
+            </a:prstGeom>
+            <a:noFill/>
+          </p:spPr>
+          <p:txBody>
+            <a:bodyPr lIns="0" rIns="0" tIns="0" bIns="0" anchorCtr="1" anchor="ctr" wrap="none"/>
+            <a:lstStyle/>
+            <a:p>
+              <a:pPr algn="l" marL="0" marR="0" indent="0">
+                <a:lnSpc>
+                  <a:spcPts val="1120"/>
+                </a:lnSpc>
+                <a:spcBef>
+                  <a:spcPts val="0"/>
+                </a:spcBef>
+                <a:spcAft>
+                  <a:spcPts val="0"/>
+                </a:spcAft>
+              </a:pPr>
+              <a:r>
+                <a:rPr sz="1120">
+                  <a:solidFill>
+                    <a:srgbClr val="4D4D4D">
+                      <a:alpha val="100000"/>
+                    </a:srgbClr>
+                  </a:solidFill>
+                  <a:latin typeface="Helvetica"/>
+                  <a:cs typeface="Helvetica"/>
+                </a:rPr>
+                <a:t>10</a:t>
+              </a:r>
+            </a:p>
+          </p:txBody>
+        </p:sp>
+        <p:sp>
+          <p:nvSpPr>
+            <p:cNvPr id="46" name="tx46"/>
+            <p:cNvSpPr/>
+            <p:nvPr/>
+          </p:nvSpPr>
+          <p:spPr>
+            <a:xfrm>
+              <a:off x="5987466" y="5693022"/>
+              <a:ext cx="158008" cy="101955"/>
+            </a:xfrm>
+            <a:prstGeom prst="rect">
+              <a:avLst/>
+            </a:prstGeom>
+            <a:noFill/>
+          </p:spPr>
+          <p:txBody>
+            <a:bodyPr lIns="0" rIns="0" tIns="0" bIns="0" anchorCtr="1" anchor="ctr" wrap="none"/>
+            <a:lstStyle/>
+            <a:p>
+              <a:pPr algn="l" marL="0" marR="0" indent="0">
+                <a:lnSpc>
+                  <a:spcPts val="1120"/>
+                </a:lnSpc>
+                <a:spcBef>
+                  <a:spcPts val="0"/>
+                </a:spcBef>
+                <a:spcAft>
+                  <a:spcPts val="0"/>
+                </a:spcAft>
+              </a:pPr>
+              <a:r>
+                <a:rPr sz="1120">
+                  <a:solidFill>
+                    <a:srgbClr val="4D4D4D">
+                      <a:alpha val="100000"/>
+                    </a:srgbClr>
+                  </a:solidFill>
+                  <a:latin typeface="Helvetica"/>
+                  <a:cs typeface="Helvetica"/>
+                </a:rPr>
+                <a:t>20</a:t>
+              </a:r>
+            </a:p>
+          </p:txBody>
+        </p:sp>
+        <p:sp>
+          <p:nvSpPr>
+            <p:cNvPr id="47" name="tx47"/>
+            <p:cNvSpPr/>
+            <p:nvPr/>
+          </p:nvSpPr>
+          <p:spPr>
+            <a:xfrm>
+              <a:off x="6860487" y="5693022"/>
+              <a:ext cx="158008" cy="101955"/>
+            </a:xfrm>
+            <a:prstGeom prst="rect">
+              <a:avLst/>
+            </a:prstGeom>
+            <a:noFill/>
+          </p:spPr>
+          <p:txBody>
+            <a:bodyPr lIns="0" rIns="0" tIns="0" bIns="0" anchorCtr="1" anchor="ctr" wrap="none"/>
+            <a:lstStyle/>
+            <a:p>
+              <a:pPr algn="l" marL="0" marR="0" indent="0">
+                <a:lnSpc>
+                  <a:spcPts val="1120"/>
+                </a:lnSpc>
+                <a:spcBef>
+                  <a:spcPts val="0"/>
+                </a:spcBef>
+                <a:spcAft>
+                  <a:spcPts val="0"/>
+                </a:spcAft>
+              </a:pPr>
+              <a:r>
+                <a:rPr sz="1120">
+                  <a:solidFill>
+                    <a:srgbClr val="4D4D4D">
+                      <a:alpha val="100000"/>
+                    </a:srgbClr>
+                  </a:solidFill>
+                  <a:latin typeface="Helvetica"/>
+                  <a:cs typeface="Helvetica"/>
+                </a:rPr>
+                <a:t>30</a:t>
+              </a:r>
+            </a:p>
+          </p:txBody>
+        </p:sp>
+        <p:sp>
+          <p:nvSpPr>
+            <p:cNvPr id="48" name="tx48"/>
+            <p:cNvSpPr/>
+            <p:nvPr/>
+          </p:nvSpPr>
+          <p:spPr>
+            <a:xfrm>
+              <a:off x="7733508" y="5693022"/>
+              <a:ext cx="158008" cy="101955"/>
+            </a:xfrm>
+            <a:prstGeom prst="rect">
+              <a:avLst/>
+            </a:prstGeom>
+            <a:noFill/>
+          </p:spPr>
+          <p:txBody>
+            <a:bodyPr lIns="0" rIns="0" tIns="0" bIns="0" anchorCtr="1" anchor="ctr" wrap="none"/>
+            <a:lstStyle/>
+            <a:p>
+              <a:pPr algn="l" marL="0" marR="0" indent="0">
+                <a:lnSpc>
+                  <a:spcPts val="1120"/>
+                </a:lnSpc>
+                <a:spcBef>
+                  <a:spcPts val="0"/>
+                </a:spcBef>
+                <a:spcAft>
+                  <a:spcPts val="0"/>
+                </a:spcAft>
+              </a:pPr>
+              <a:r>
+                <a:rPr sz="1120">
+                  <a:solidFill>
+                    <a:srgbClr val="4D4D4D">
+                      <a:alpha val="100000"/>
+                    </a:srgbClr>
+                  </a:solidFill>
+                  <a:latin typeface="Helvetica"/>
+                  <a:cs typeface="Helvetica"/>
+                </a:rPr>
+                <a:t>40</a:t>
+              </a:r>
+            </a:p>
+          </p:txBody>
+        </p:sp>
+        <p:sp>
+          <p:nvSpPr>
+            <p:cNvPr id="49" name="tx49"/>
+            <p:cNvSpPr/>
+            <p:nvPr/>
+          </p:nvSpPr>
+          <p:spPr>
+            <a:xfrm>
+              <a:off x="3941888" y="5870717"/>
+              <a:ext cx="1630100" cy="127558"/>
             </a:xfrm>
             <a:prstGeom prst="rect">
               <a:avLst/>
@@ -4955,572 +5526,20 @@
                   <a:latin typeface="Helvetica"/>
                   <a:cs typeface="Helvetica"/>
                 </a:rPr>
-                <a:t>eGFR difference  =  (eGFR</a:t>
+                <a:t>eGFR difference (%)</a:t>
               </a:r>
             </a:p>
           </p:txBody>
         </p:sp>
         <p:sp>
           <p:nvSpPr>
-            <p:cNvPr id="37" name="tx37"/>
-            <p:cNvSpPr/>
-            <p:nvPr/>
-          </p:nvSpPr>
-          <p:spPr>
-            <a:xfrm>
-              <a:off x="4827210" y="5905308"/>
-              <a:ext cx="89885" cy="89245"/>
-            </a:xfrm>
-            <a:prstGeom prst="rect">
-              <a:avLst/>
-            </a:prstGeom>
-            <a:noFill/>
-          </p:spPr>
-          <p:txBody>
-            <a:bodyPr lIns="0" rIns="0" tIns="0" bIns="0" anchorCtr="1" anchor="ctr" wrap="none"/>
-            <a:lstStyle/>
-            <a:p>
-              <a:pPr algn="l" marL="0" marR="0" indent="0">
-                <a:lnSpc>
-                  <a:spcPts val="979"/>
-                </a:lnSpc>
-                <a:spcBef>
-                  <a:spcPts val="0"/>
-                </a:spcBef>
-                <a:spcAft>
-                  <a:spcPts val="0"/>
-                </a:spcAft>
-              </a:pPr>
-              <a:r>
-                <a:rPr sz="979">
-                  <a:solidFill>
-                    <a:srgbClr val="000000">
-                      <a:alpha val="100000"/>
-                    </a:srgbClr>
-                  </a:solidFill>
-                  <a:latin typeface="Helvetica"/>
-                  <a:cs typeface="Helvetica"/>
-                </a:rPr>
-                <a:t>C</a:t>
-              </a:r>
-            </a:p>
-          </p:txBody>
-        </p:sp>
-        <p:sp>
-          <p:nvSpPr>
-            <p:cNvPr id="38" name="tx38"/>
-            <p:cNvSpPr/>
-            <p:nvPr/>
-          </p:nvSpPr>
-          <p:spPr>
-            <a:xfrm>
-              <a:off x="4917095" y="5905308"/>
-              <a:ext cx="89885" cy="89245"/>
-            </a:xfrm>
-            <a:prstGeom prst="rect">
-              <a:avLst/>
-            </a:prstGeom>
-            <a:noFill/>
-          </p:spPr>
-          <p:txBody>
-            <a:bodyPr lIns="0" rIns="0" tIns="0" bIns="0" anchorCtr="1" anchor="ctr" wrap="none"/>
-            <a:lstStyle/>
-            <a:p>
-              <a:pPr algn="l" marL="0" marR="0" indent="0">
-                <a:lnSpc>
-                  <a:spcPts val="979"/>
-                </a:lnSpc>
-                <a:spcBef>
-                  <a:spcPts val="0"/>
-                </a:spcBef>
-                <a:spcAft>
-                  <a:spcPts val="0"/>
-                </a:spcAft>
-              </a:pPr>
-              <a:r>
-                <a:rPr sz="979">
-                  <a:solidFill>
-                    <a:srgbClr val="000000">
-                      <a:alpha val="100000"/>
-                    </a:srgbClr>
-                  </a:solidFill>
-                  <a:latin typeface="Helvetica"/>
-                  <a:cs typeface="Helvetica"/>
-                </a:rPr>
-                <a:t>R</a:t>
-              </a:r>
-            </a:p>
-          </p:txBody>
-        </p:sp>
-        <p:sp>
-          <p:nvSpPr>
-            <p:cNvPr id="39" name="tx39"/>
-            <p:cNvSpPr/>
-            <p:nvPr/>
-          </p:nvSpPr>
-          <p:spPr>
-            <a:xfrm>
-              <a:off x="5006981" y="5884826"/>
-              <a:ext cx="68305" cy="109728"/>
-            </a:xfrm>
-            <a:prstGeom prst="rect">
-              <a:avLst/>
-            </a:prstGeom>
-            <a:noFill/>
-          </p:spPr>
-          <p:txBody>
-            <a:bodyPr lIns="0" rIns="0" tIns="0" bIns="0" anchorCtr="1" anchor="ctr" wrap="none"/>
-            <a:lstStyle/>
-            <a:p>
-              <a:pPr algn="l" marL="0" marR="0" indent="0">
-                <a:lnSpc>
-                  <a:spcPts val="979"/>
-                </a:lnSpc>
-                <a:spcBef>
-                  <a:spcPts val="0"/>
-                </a:spcBef>
-                <a:spcAft>
-                  <a:spcPts val="0"/>
-                </a:spcAft>
-              </a:pPr>
-              <a:r>
-                <a:rPr sz="979">
-                  <a:solidFill>
-                    <a:srgbClr val="000000">
-                      <a:alpha val="100000"/>
-                    </a:srgbClr>
-                  </a:solidFill>
-                  <a:latin typeface="Symbol"/>
-                  <a:cs typeface="Symbol"/>
-                </a:rPr>
-                <a:t>−</a:t>
-              </a:r>
-            </a:p>
-          </p:txBody>
-        </p:sp>
-        <p:sp>
-          <p:nvSpPr>
-            <p:cNvPr id="40" name="tx40"/>
-            <p:cNvSpPr/>
-            <p:nvPr/>
-          </p:nvSpPr>
-          <p:spPr>
-            <a:xfrm>
-              <a:off x="5075286" y="5905308"/>
-              <a:ext cx="89885" cy="89245"/>
-            </a:xfrm>
-            <a:prstGeom prst="rect">
-              <a:avLst/>
-            </a:prstGeom>
-            <a:noFill/>
-          </p:spPr>
-          <p:txBody>
-            <a:bodyPr lIns="0" rIns="0" tIns="0" bIns="0" anchorCtr="1" anchor="ctr" wrap="none"/>
-            <a:lstStyle/>
-            <a:p>
-              <a:pPr algn="l" marL="0" marR="0" indent="0">
-                <a:lnSpc>
-                  <a:spcPts val="979"/>
-                </a:lnSpc>
-                <a:spcBef>
-                  <a:spcPts val="0"/>
-                </a:spcBef>
-                <a:spcAft>
-                  <a:spcPts val="0"/>
-                </a:spcAft>
-              </a:pPr>
-              <a:r>
-                <a:rPr sz="979">
-                  <a:solidFill>
-                    <a:srgbClr val="000000">
-                      <a:alpha val="100000"/>
-                    </a:srgbClr>
-                  </a:solidFill>
-                  <a:latin typeface="Helvetica"/>
-                  <a:cs typeface="Helvetica"/>
-                </a:rPr>
-                <a:t>C</a:t>
-              </a:r>
-            </a:p>
-          </p:txBody>
-        </p:sp>
-        <p:sp>
-          <p:nvSpPr>
-            <p:cNvPr id="41" name="tx41"/>
-            <p:cNvSpPr/>
-            <p:nvPr/>
-          </p:nvSpPr>
-          <p:spPr>
-            <a:xfrm>
-              <a:off x="5165172" y="5905308"/>
-              <a:ext cx="83027" cy="89245"/>
-            </a:xfrm>
-            <a:prstGeom prst="rect">
-              <a:avLst/>
-            </a:prstGeom>
-            <a:noFill/>
-          </p:spPr>
-          <p:txBody>
-            <a:bodyPr lIns="0" rIns="0" tIns="0" bIns="0" anchorCtr="1" anchor="ctr" wrap="none"/>
-            <a:lstStyle/>
-            <a:p>
-              <a:pPr algn="l" marL="0" marR="0" indent="0">
-                <a:lnSpc>
-                  <a:spcPts val="979"/>
-                </a:lnSpc>
-                <a:spcBef>
-                  <a:spcPts val="0"/>
-                </a:spcBef>
-                <a:spcAft>
-                  <a:spcPts val="0"/>
-                </a:spcAft>
-              </a:pPr>
-              <a:r>
-                <a:rPr sz="979">
-                  <a:solidFill>
-                    <a:srgbClr val="000000">
-                      <a:alpha val="100000"/>
-                    </a:srgbClr>
-                  </a:solidFill>
-                  <a:latin typeface="Helvetica"/>
-                  <a:cs typeface="Helvetica"/>
-                </a:rPr>
-                <a:t>Y</a:t>
-              </a:r>
-            </a:p>
-          </p:txBody>
-        </p:sp>
-        <p:sp>
-          <p:nvSpPr>
-            <p:cNvPr id="42" name="tx42"/>
-            <p:cNvSpPr/>
-            <p:nvPr/>
-          </p:nvSpPr>
-          <p:spPr>
-            <a:xfrm>
-              <a:off x="5248199" y="5905308"/>
-              <a:ext cx="83027" cy="89245"/>
-            </a:xfrm>
-            <a:prstGeom prst="rect">
-              <a:avLst/>
-            </a:prstGeom>
-            <a:noFill/>
-          </p:spPr>
-          <p:txBody>
-            <a:bodyPr lIns="0" rIns="0" tIns="0" bIns="0" anchorCtr="1" anchor="ctr" wrap="none"/>
-            <a:lstStyle/>
-            <a:p>
-              <a:pPr algn="l" marL="0" marR="0" indent="0">
-                <a:lnSpc>
-                  <a:spcPts val="979"/>
-                </a:lnSpc>
-                <a:spcBef>
-                  <a:spcPts val="0"/>
-                </a:spcBef>
-                <a:spcAft>
-                  <a:spcPts val="0"/>
-                </a:spcAft>
-              </a:pPr>
-              <a:r>
-                <a:rPr sz="979">
-                  <a:solidFill>
-                    <a:srgbClr val="000000">
-                      <a:alpha val="100000"/>
-                    </a:srgbClr>
-                  </a:solidFill>
-                  <a:latin typeface="Helvetica"/>
-                  <a:cs typeface="Helvetica"/>
-                </a:rPr>
-                <a:t>S</a:t>
-              </a:r>
-            </a:p>
-          </p:txBody>
-        </p:sp>
-        <p:sp>
-          <p:nvSpPr>
-            <p:cNvPr id="43" name="tx43"/>
-            <p:cNvSpPr/>
-            <p:nvPr/>
-          </p:nvSpPr>
-          <p:spPr>
-            <a:xfrm>
-              <a:off x="5331227" y="5834415"/>
-              <a:ext cx="558149" cy="127558"/>
-            </a:xfrm>
-            <a:prstGeom prst="rect">
-              <a:avLst/>
-            </a:prstGeom>
-            <a:noFill/>
-          </p:spPr>
-          <p:txBody>
-            <a:bodyPr lIns="0" rIns="0" tIns="0" bIns="0" anchorCtr="1" anchor="ctr" wrap="none"/>
-            <a:lstStyle/>
-            <a:p>
-              <a:pPr algn="l" marL="0" marR="0" indent="0">
-                <a:lnSpc>
-                  <a:spcPts val="1400"/>
-                </a:lnSpc>
-                <a:spcBef>
-                  <a:spcPts val="0"/>
-                </a:spcBef>
-                <a:spcAft>
-                  <a:spcPts val="0"/>
-                </a:spcAft>
-              </a:pPr>
-              <a:r>
-                <a:rPr sz="1400">
-                  <a:solidFill>
-                    <a:srgbClr val="000000">
-                      <a:alpha val="100000"/>
-                    </a:srgbClr>
-                  </a:solidFill>
-                  <a:latin typeface="Helvetica"/>
-                  <a:cs typeface="Helvetica"/>
-                </a:rPr>
-                <a:t> − CrCl</a:t>
-              </a:r>
-            </a:p>
-          </p:txBody>
-        </p:sp>
-        <p:sp>
-          <p:nvSpPr>
-            <p:cNvPr id="44" name="tx44"/>
-            <p:cNvSpPr/>
-            <p:nvPr/>
-          </p:nvSpPr>
-          <p:spPr>
-            <a:xfrm>
-              <a:off x="5889377" y="5905308"/>
-              <a:ext cx="89885" cy="89245"/>
-            </a:xfrm>
-            <a:prstGeom prst="rect">
-              <a:avLst/>
-            </a:prstGeom>
-            <a:noFill/>
-          </p:spPr>
-          <p:txBody>
-            <a:bodyPr lIns="0" rIns="0" tIns="0" bIns="0" anchorCtr="1" anchor="ctr" wrap="none"/>
-            <a:lstStyle/>
-            <a:p>
-              <a:pPr algn="l" marL="0" marR="0" indent="0">
-                <a:lnSpc>
-                  <a:spcPts val="979"/>
-                </a:lnSpc>
-                <a:spcBef>
-                  <a:spcPts val="0"/>
-                </a:spcBef>
-                <a:spcAft>
-                  <a:spcPts val="0"/>
-                </a:spcAft>
-              </a:pPr>
-              <a:r>
-                <a:rPr sz="979">
-                  <a:solidFill>
-                    <a:srgbClr val="000000">
-                      <a:alpha val="100000"/>
-                    </a:srgbClr>
-                  </a:solidFill>
-                  <a:latin typeface="Helvetica"/>
-                  <a:cs typeface="Helvetica"/>
-                </a:rPr>
-                <a:t>C</a:t>
-              </a:r>
-            </a:p>
-          </p:txBody>
-        </p:sp>
-        <p:sp>
-          <p:nvSpPr>
-            <p:cNvPr id="45" name="tx45"/>
-            <p:cNvSpPr/>
-            <p:nvPr/>
-          </p:nvSpPr>
-          <p:spPr>
-            <a:xfrm>
-              <a:off x="5979262" y="5905308"/>
-              <a:ext cx="96743" cy="89245"/>
-            </a:xfrm>
-            <a:prstGeom prst="rect">
-              <a:avLst/>
-            </a:prstGeom>
-            <a:noFill/>
-          </p:spPr>
-          <p:txBody>
-            <a:bodyPr lIns="0" rIns="0" tIns="0" bIns="0" anchorCtr="1" anchor="ctr" wrap="none"/>
-            <a:lstStyle/>
-            <a:p>
-              <a:pPr algn="l" marL="0" marR="0" indent="0">
-                <a:lnSpc>
-                  <a:spcPts val="979"/>
-                </a:lnSpc>
-                <a:spcBef>
-                  <a:spcPts val="0"/>
-                </a:spcBef>
-                <a:spcAft>
-                  <a:spcPts val="0"/>
-                </a:spcAft>
-              </a:pPr>
-              <a:r>
-                <a:rPr sz="979">
-                  <a:solidFill>
-                    <a:srgbClr val="000000">
-                      <a:alpha val="100000"/>
-                    </a:srgbClr>
-                  </a:solidFill>
-                  <a:latin typeface="Helvetica"/>
-                  <a:cs typeface="Helvetica"/>
-                </a:rPr>
-                <a:t>G</a:t>
-              </a:r>
-            </a:p>
-          </p:txBody>
-        </p:sp>
-        <p:sp>
-          <p:nvSpPr>
-            <p:cNvPr id="46" name="tx46"/>
-            <p:cNvSpPr/>
-            <p:nvPr/>
-          </p:nvSpPr>
-          <p:spPr>
-            <a:xfrm>
-              <a:off x="6076006" y="5834415"/>
-              <a:ext cx="562904" cy="127558"/>
-            </a:xfrm>
-            <a:prstGeom prst="rect">
-              <a:avLst/>
-            </a:prstGeom>
-            <a:noFill/>
-          </p:spPr>
-          <p:txBody>
-            <a:bodyPr lIns="0" rIns="0" tIns="0" bIns="0" anchorCtr="1" anchor="ctr" wrap="none"/>
-            <a:lstStyle/>
-            <a:p>
-              <a:pPr algn="l" marL="0" marR="0" indent="0">
-                <a:lnSpc>
-                  <a:spcPts val="1400"/>
-                </a:lnSpc>
-                <a:spcBef>
-                  <a:spcPts val="0"/>
-                </a:spcBef>
-                <a:spcAft>
-                  <a:spcPts val="0"/>
-                </a:spcAft>
-              </a:pPr>
-              <a:r>
-                <a:rPr sz="1400">
-                  <a:solidFill>
-                    <a:srgbClr val="000000">
-                      <a:alpha val="100000"/>
-                    </a:srgbClr>
-                  </a:solidFill>
-                  <a:latin typeface="Helvetica"/>
-                  <a:cs typeface="Helvetica"/>
-                </a:rPr>
-                <a:t>) / CrCl</a:t>
-              </a:r>
-            </a:p>
-          </p:txBody>
-        </p:sp>
-        <p:sp>
-          <p:nvSpPr>
-            <p:cNvPr id="47" name="tx47"/>
-            <p:cNvSpPr/>
-            <p:nvPr/>
-          </p:nvSpPr>
-          <p:spPr>
-            <a:xfrm>
-              <a:off x="6638910" y="5905308"/>
-              <a:ext cx="89885" cy="89245"/>
-            </a:xfrm>
-            <a:prstGeom prst="rect">
-              <a:avLst/>
-            </a:prstGeom>
-            <a:noFill/>
-          </p:spPr>
-          <p:txBody>
-            <a:bodyPr lIns="0" rIns="0" tIns="0" bIns="0" anchorCtr="1" anchor="ctr" wrap="none"/>
-            <a:lstStyle/>
-            <a:p>
-              <a:pPr algn="l" marL="0" marR="0" indent="0">
-                <a:lnSpc>
-                  <a:spcPts val="979"/>
-                </a:lnSpc>
-                <a:spcBef>
-                  <a:spcPts val="0"/>
-                </a:spcBef>
-                <a:spcAft>
-                  <a:spcPts val="0"/>
-                </a:spcAft>
-              </a:pPr>
-              <a:r>
-                <a:rPr sz="979">
-                  <a:solidFill>
-                    <a:srgbClr val="000000">
-                      <a:alpha val="100000"/>
-                    </a:srgbClr>
-                  </a:solidFill>
-                  <a:latin typeface="Helvetica"/>
-                  <a:cs typeface="Helvetica"/>
-                </a:rPr>
-                <a:t>C</a:t>
-              </a:r>
-            </a:p>
-          </p:txBody>
-        </p:sp>
-        <p:sp>
-          <p:nvSpPr>
-            <p:cNvPr id="48" name="tx48"/>
-            <p:cNvSpPr/>
-            <p:nvPr/>
-          </p:nvSpPr>
-          <p:spPr>
-            <a:xfrm>
-              <a:off x="6728796" y="5905308"/>
-              <a:ext cx="96743" cy="89245"/>
-            </a:xfrm>
-            <a:prstGeom prst="rect">
-              <a:avLst/>
-            </a:prstGeom>
-            <a:noFill/>
-          </p:spPr>
-          <p:txBody>
-            <a:bodyPr lIns="0" rIns="0" tIns="0" bIns="0" anchorCtr="1" anchor="ctr" wrap="none"/>
-            <a:lstStyle/>
-            <a:p>
-              <a:pPr algn="l" marL="0" marR="0" indent="0">
-                <a:lnSpc>
-                  <a:spcPts val="979"/>
-                </a:lnSpc>
-                <a:spcBef>
-                  <a:spcPts val="0"/>
-                </a:spcBef>
-                <a:spcAft>
-                  <a:spcPts val="0"/>
-                </a:spcAft>
-              </a:pPr>
-              <a:r>
-                <a:rPr sz="979">
-                  <a:solidFill>
-                    <a:srgbClr val="000000">
-                      <a:alpha val="100000"/>
-                    </a:srgbClr>
-                  </a:solidFill>
-                  <a:latin typeface="Helvetica"/>
-                  <a:cs typeface="Helvetica"/>
-                </a:rPr>
-                <a:t>G</a:t>
-              </a:r>
-            </a:p>
-          </p:txBody>
-        </p:sp>
-        <p:sp>
-          <p:nvSpPr>
-            <p:cNvPr id="49" name="tx49"/>
+            <p:cNvPr id="50" name="tx50"/>
             <p:cNvSpPr/>
             <p:nvPr/>
           </p:nvSpPr>
           <p:spPr>
             <a:xfrm rot="-5400000">
-              <a:off x="-37527" y="3827572"/>
+              <a:off x="-37527" y="3835619"/>
               <a:ext cx="1294150" cy="127558"/>
             </a:xfrm>
             <a:prstGeom prst="rect">
@@ -5560,14 +5579,14 @@
         </p:sp>
         <p:sp>
           <p:nvSpPr>
-            <p:cNvPr id="50" name="tx50"/>
+            <p:cNvPr id="51" name="tx51"/>
             <p:cNvSpPr/>
             <p:nvPr/>
           </p:nvSpPr>
           <p:spPr>
             <a:xfrm>
               <a:off x="915645" y="1977589"/>
-              <a:ext cx="6018672" cy="109362"/>
+              <a:ext cx="3786804" cy="91165"/>
             </a:xfrm>
             <a:prstGeom prst="rect">
               <a:avLst/>
@@ -5580,7 +5599,7 @@
             <a:p>
               <a:pPr algn="l" marL="0" marR="0" indent="0">
                 <a:lnSpc>
-                  <a:spcPts val="1200"/>
+                  <a:spcPts val="1000"/>
                 </a:lnSpc>
                 <a:spcBef>
                   <a:spcPts val="0"/>
@@ -5590,7 +5609,7 @@
                 </a:spcAft>
               </a:pPr>
               <a:r>
-                <a:rPr sz="1200">
+                <a:rPr sz="1000">
                   <a:solidFill>
                     <a:srgbClr val="404040">
                       <a:alpha val="100000"/>
@@ -5599,14 +5618,14 @@
                   <a:latin typeface="Helvetica"/>
                   <a:cs typeface="Helvetica"/>
                 </a:rPr>
-                <a:t>subHR = 0.64 (95% CI 0.51-0.80), p = &lt;0.001   (per 0.1-unit increase in eGFR difference)</a:t>
+                <a:t>subHR = 1.57 (95% CI 1.25-1.97), p = &lt;0.001   (per 10% decrease)</a:t>
               </a:r>
             </a:p>
           </p:txBody>
         </p:sp>
         <p:sp>
           <p:nvSpPr>
-            <p:cNvPr id="51" name="tx51"/>
+            <p:cNvPr id="52" name="tx52"/>
             <p:cNvSpPr/>
             <p:nvPr/>
           </p:nvSpPr>
